--- a/data/deep_dives/carteira_btg_pactual_1t26_56d75415/exports/documentary_comparison.pptx
+++ b/data/deep_dives/carteira_btg_pactual_1t26_56d75415/exports/documentary_comparison.pptx
@@ -7523,7 +7523,7 @@
                       <a:r>
                         <a:rPr sz="1300" b="1">
                           <a:solidFill>
-                            <a:srgbClr val="1F1F1F"/>
+                            <a:srgbClr val="FFFFFF"/>
                           </a:solidFill>
                           <a:latin typeface="Calibri"/>
                         </a:rPr>
@@ -7533,7 +7533,7 @@
                   </a:txBody>
                   <a:tcPr marL="91440" marR="91440" marT="41148" marB="41148" anchor="ctr">
                     <a:solidFill>
-                      <a:srgbClr val="EC7000"/>
+                      <a:srgbClr val="FF6200"/>
                     </a:solidFill>
                     <a:lnL>
                       <a:noFill/>
@@ -7572,7 +7572,7 @@
                       <a:r>
                         <a:rPr sz="1300" b="1">
                           <a:solidFill>
-                            <a:srgbClr val="1F1F1F"/>
+                            <a:srgbClr val="FFFFFF"/>
                           </a:solidFill>
                           <a:latin typeface="Calibri"/>
                         </a:rPr>
@@ -7582,7 +7582,7 @@
                   </a:txBody>
                   <a:tcPr marL="91440" marR="91440" marT="41148" marB="41148" anchor="ctr">
                     <a:solidFill>
-                      <a:srgbClr val="EC7000"/>
+                      <a:srgbClr val="FF6200"/>
                     </a:solidFill>
                     <a:lnL>
                       <a:noFill/>
@@ -7621,7 +7621,7 @@
                       <a:r>
                         <a:rPr sz="1300" b="1">
                           <a:solidFill>
-                            <a:srgbClr val="1F1F1F"/>
+                            <a:srgbClr val="FFFFFF"/>
                           </a:solidFill>
                           <a:latin typeface="Calibri"/>
                         </a:rPr>
@@ -7631,7 +7631,7 @@
                   </a:txBody>
                   <a:tcPr marL="91440" marR="91440" marT="41148" marB="41148" anchor="ctr">
                     <a:solidFill>
-                      <a:srgbClr val="EC7000"/>
+                      <a:srgbClr val="FF6200"/>
                     </a:solidFill>
                     <a:lnL>
                       <a:noFill/>
@@ -7670,7 +7670,7 @@
                       <a:r>
                         <a:rPr sz="1300" b="1">
                           <a:solidFill>
-                            <a:srgbClr val="1F1F1F"/>
+                            <a:srgbClr val="FFFFFF"/>
                           </a:solidFill>
                           <a:latin typeface="Calibri"/>
                         </a:rPr>
@@ -7692,7 +7692,7 @@
                       <a:r>
                         <a:rPr sz="1300" b="1">
                           <a:solidFill>
-                            <a:srgbClr val="1F1F1F"/>
+                            <a:srgbClr val="FFFFFF"/>
                           </a:solidFill>
                           <a:latin typeface="Calibri"/>
                         </a:rPr>
@@ -7702,7 +7702,7 @@
                   </a:txBody>
                   <a:tcPr marL="91440" marR="91440" marT="41148" marB="41148" anchor="ctr">
                     <a:solidFill>
-                      <a:srgbClr val="EC7000"/>
+                      <a:srgbClr val="FF6200"/>
                     </a:solidFill>
                     <a:lnL>
                       <a:noFill/>
@@ -7741,7 +7741,7 @@
                       <a:r>
                         <a:rPr sz="1300" b="1">
                           <a:solidFill>
-                            <a:srgbClr val="1F1F1F"/>
+                            <a:srgbClr val="FFFFFF"/>
                           </a:solidFill>
                           <a:latin typeface="Calibri"/>
                         </a:rPr>
@@ -7763,7 +7763,7 @@
                       <a:r>
                         <a:rPr sz="1300" b="1">
                           <a:solidFill>
-                            <a:srgbClr val="1F1F1F"/>
+                            <a:srgbClr val="FFFFFF"/>
                           </a:solidFill>
                           <a:latin typeface="Calibri"/>
                         </a:rPr>
@@ -7773,7 +7773,7 @@
                   </a:txBody>
                   <a:tcPr marL="91440" marR="91440" marT="41148" marB="41148" anchor="ctr">
                     <a:solidFill>
-                      <a:srgbClr val="EC7000"/>
+                      <a:srgbClr val="FF6200"/>
                     </a:solidFill>
                     <a:lnL>
                       <a:noFill/>
@@ -8344,51 +8344,7 @@
                           </a:solidFill>
                           <a:latin typeface="Calibri"/>
                         </a:rPr>
-                        <a:t>a órgãos conveniados;</a:t>
-                      </a:r>
-                    </a:p>
-                    <a:p>
-                      <a:pPr algn="ctr">
-                        <a:lnSpc>
-                          <a:spcPct val="100000"/>
-                        </a:lnSpc>
-                        <a:spcBef>
-                          <a:spcPts val="0"/>
-                        </a:spcBef>
-                        <a:spcAft>
-                          <a:spcPts val="0"/>
-                        </a:spcAft>
-                      </a:pPr>
-                      <a:r>
-                        <a:rPr sz="1300" b="0">
-                          <a:solidFill>
-                            <a:srgbClr val="1F1F1F"/>
-                          </a:solidFill>
-                          <a:latin typeface="Calibri"/>
-                        </a:rPr>
-                        <a:t>nomes finais não</a:t>
-                      </a:r>
-                    </a:p>
-                    <a:p>
-                      <a:pPr algn="ctr">
-                        <a:lnSpc>
-                          <a:spcPct val="100000"/>
-                        </a:lnSpc>
-                        <a:spcBef>
-                          <a:spcPts val="0"/>
-                        </a:spcBef>
-                        <a:spcAft>
-                          <a:spcPts val="0"/>
-                        </a:spcAft>
-                      </a:pPr>
-                      <a:r>
-                        <a:rPr sz="1300" b="0">
-                          <a:solidFill>
-                            <a:srgbClr val="1F1F1F"/>
-                          </a:solidFill>
-                          <a:latin typeface="Calibri"/>
-                        </a:rPr>
-                        <a:t>identificados</a:t>
+                        <a:t>a órgãos conveniados</a:t>
                       </a:r>
                     </a:p>
                   </a:txBody>
@@ -8548,29 +8504,7 @@
                           </a:solidFill>
                           <a:latin typeface="Calibri"/>
                         </a:rPr>
-                        <a:t>Não localizado no</a:t>
-                      </a:r>
-                    </a:p>
-                    <a:p>
-                      <a:pPr algn="ctr">
-                        <a:lnSpc>
-                          <a:spcPct val="100000"/>
-                        </a:lnSpc>
-                        <a:spcBef>
-                          <a:spcPts val="0"/>
-                        </a:spcBef>
-                        <a:spcAft>
-                          <a:spcPts val="0"/>
-                        </a:spcAft>
-                      </a:pPr>
-                      <a:r>
-                        <a:rPr sz="1300" b="0">
-                          <a:solidFill>
-                            <a:srgbClr val="1F1F1F"/>
-                          </a:solidFill>
-                          <a:latin typeface="Calibri"/>
-                        </a:rPr>
-                        <a:t>corpus acessível</a:t>
+                        <a:t>-</a:t>
                       </a:r>
                     </a:p>
                   </a:txBody>
@@ -8967,29 +8901,7 @@
                           </a:solidFill>
                           <a:latin typeface="Calibri"/>
                         </a:rPr>
-                        <a:t>Não localizado no</a:t>
-                      </a:r>
-                    </a:p>
-                    <a:p>
-                      <a:pPr algn="ctr">
-                        <a:lnSpc>
-                          <a:spcPct val="100000"/>
-                        </a:lnSpc>
-                        <a:spcBef>
-                          <a:spcPts val="0"/>
-                        </a:spcBef>
-                        <a:spcAft>
-                          <a:spcPts val="0"/>
-                        </a:spcAft>
-                      </a:pPr>
-                      <a:r>
-                        <a:rPr sz="1300" b="0">
-                          <a:solidFill>
-                            <a:srgbClr val="1F1F1F"/>
-                          </a:solidFill>
-                          <a:latin typeface="Calibri"/>
-                        </a:rPr>
-                        <a:t>corpus acessível</a:t>
+                        <a:t>-</a:t>
                       </a:r>
                     </a:p>
                   </a:txBody>
@@ -9274,7 +9186,7 @@
         </p:nvGraphicFramePr>
         <p:xfrm>
           <a:off x="438912" y="932688"/>
-          <a:ext cx="11313870" cy="2089404"/>
+          <a:ext cx="11313870" cy="1901952"/>
         </p:xfrm>
         <a:graphic>
           <a:graphicData uri="http://schemas.openxmlformats.org/drawingml/2006/table">
@@ -9309,7 +9221,7 @@
                       <a:r>
                         <a:rPr sz="1300" b="1">
                           <a:solidFill>
-                            <a:srgbClr val="1F1F1F"/>
+                            <a:srgbClr val="FFFFFF"/>
                           </a:solidFill>
                           <a:latin typeface="Calibri"/>
                         </a:rPr>
@@ -9319,7 +9231,7 @@
                   </a:txBody>
                   <a:tcPr marL="91440" marR="91440" marT="41148" marB="41148" anchor="ctr">
                     <a:solidFill>
-                      <a:srgbClr val="EC7000"/>
+                      <a:srgbClr val="FF6200"/>
                     </a:solidFill>
                     <a:lnL>
                       <a:noFill/>
@@ -9358,7 +9270,7 @@
                       <a:r>
                         <a:rPr sz="1300" b="1">
                           <a:solidFill>
-                            <a:srgbClr val="1F1F1F"/>
+                            <a:srgbClr val="FFFFFF"/>
                           </a:solidFill>
                           <a:latin typeface="Calibri"/>
                         </a:rPr>
@@ -9368,7 +9280,7 @@
                   </a:txBody>
                   <a:tcPr marL="91440" marR="91440" marT="41148" marB="41148" anchor="ctr">
                     <a:solidFill>
-                      <a:srgbClr val="EC7000"/>
+                      <a:srgbClr val="FF6200"/>
                     </a:solidFill>
                     <a:lnL>
                       <a:noFill/>
@@ -9407,7 +9319,7 @@
                       <a:r>
                         <a:rPr sz="1300" b="1">
                           <a:solidFill>
-                            <a:srgbClr val="1F1F1F"/>
+                            <a:srgbClr val="FFFFFF"/>
                           </a:solidFill>
                           <a:latin typeface="Calibri"/>
                         </a:rPr>
@@ -9417,7 +9329,7 @@
                   </a:txBody>
                   <a:tcPr marL="91440" marR="91440" marT="41148" marB="41148" anchor="ctr">
                     <a:solidFill>
-                      <a:srgbClr val="EC7000"/>
+                      <a:srgbClr val="FF6200"/>
                     </a:solidFill>
                     <a:lnL>
                       <a:noFill/>
@@ -9556,7 +9468,150 @@
                           </a:solidFill>
                           <a:latin typeface="Calibri"/>
                         </a:rPr>
-                        <a:t>Não localizado no corpus acessível</a:t>
+                        <a:t>-</a:t>
+                      </a:r>
+                    </a:p>
+                  </a:txBody>
+                  <a:tcPr marL="91440" marR="91440" marT="41148" marB="41148" anchor="ctr">
+                    <a:solidFill>
+                      <a:srgbClr val="FFFFFF"/>
+                    </a:solidFill>
+                    <a:lnL>
+                      <a:noFill/>
+                    </a:lnL>
+                    <a:lnR>
+                      <a:noFill/>
+                    </a:lnR>
+                    <a:lnT>
+                      <a:noFill/>
+                    </a:lnT>
+                    <a:lnB>
+                      <a:noFill/>
+                    </a:lnB>
+                  </a:tcPr>
+                </a:tc>
+              </a:tr>
+              <a:tr h="283464">
+                <a:tc>
+                  <a:txBody>
+                    <a:bodyPr wrap="square">
+                      <a:noAutofit/>
+                    </a:bodyPr>
+                    <a:lstStyle/>
+                    <a:p>
+                      <a:pPr algn="l">
+                        <a:lnSpc>
+                          <a:spcPct val="100000"/>
+                        </a:lnSpc>
+                        <a:spcBef>
+                          <a:spcPts val="0"/>
+                        </a:spcBef>
+                        <a:spcAft>
+                          <a:spcPts val="0"/>
+                        </a:spcAft>
+                      </a:pPr>
+                      <a:r>
+                        <a:rPr sz="1300" b="1">
+                          <a:solidFill>
+                            <a:srgbClr val="1F1F1F"/>
+                          </a:solidFill>
+                          <a:latin typeface="Calibri"/>
+                        </a:rPr>
+                        <a:t>Remuneração</a:t>
+                      </a:r>
+                    </a:p>
+                  </a:txBody>
+                  <a:tcPr marL="91440" marR="91440" marT="41148" marB="41148" anchor="ctr">
+                    <a:solidFill>
+                      <a:srgbClr val="FFFFFF"/>
+                    </a:solidFill>
+                    <a:lnL>
+                      <a:noFill/>
+                    </a:lnL>
+                    <a:lnR>
+                      <a:noFill/>
+                    </a:lnR>
+                    <a:lnT>
+                      <a:noFill/>
+                    </a:lnT>
+                    <a:lnB>
+                      <a:noFill/>
+                    </a:lnB>
+                  </a:tcPr>
+                </a:tc>
+                <a:tc>
+                  <a:txBody>
+                    <a:bodyPr wrap="square">
+                      <a:noAutofit/>
+                    </a:bodyPr>
+                    <a:lstStyle/>
+                    <a:p>
+                      <a:pPr algn="ctr">
+                        <a:lnSpc>
+                          <a:spcPct val="100000"/>
+                        </a:lnSpc>
+                        <a:spcBef>
+                          <a:spcPts val="0"/>
+                        </a:spcBef>
+                        <a:spcAft>
+                          <a:spcPts val="0"/>
+                        </a:spcAft>
+                      </a:pPr>
+                      <a:r>
+                        <a:rPr sz="1300" b="0">
+                          <a:solidFill>
+                            <a:srgbClr val="1F1F1F"/>
+                          </a:solidFill>
+                          <a:latin typeface="Calibri"/>
+                        </a:rPr>
+                        <a:t>Ganho patrimonial por cash sweep</a:t>
+                      </a:r>
+                    </a:p>
+                  </a:txBody>
+                  <a:tcPr marL="91440" marR="91440" marT="41148" marB="41148" anchor="ctr">
+                    <a:solidFill>
+                      <a:srgbClr val="FFFFFF"/>
+                    </a:solidFill>
+                    <a:lnL>
+                      <a:noFill/>
+                    </a:lnL>
+                    <a:lnR>
+                      <a:noFill/>
+                    </a:lnR>
+                    <a:lnT>
+                      <a:noFill/>
+                    </a:lnT>
+                    <a:lnB>
+                      <a:noFill/>
+                    </a:lnB>
+                  </a:tcPr>
+                </a:tc>
+                <a:tc>
+                  <a:txBody>
+                    <a:bodyPr wrap="square">
+                      <a:noAutofit/>
+                    </a:bodyPr>
+                    <a:lstStyle/>
+                    <a:p>
+                      <a:pPr algn="ctr">
+                        <a:lnSpc>
+                          <a:spcPct val="100000"/>
+                        </a:lnSpc>
+                        <a:spcBef>
+                          <a:spcPts val="0"/>
+                        </a:spcBef>
+                        <a:spcAft>
+                          <a:spcPts val="0"/>
+                        </a:spcAft>
+                      </a:pPr>
+                      <a:r>
+                        <a:rPr sz="1300" b="0">
+                          <a:solidFill>
+                            <a:srgbClr val="1F1F1F"/>
+                          </a:solidFill>
+                          <a:latin typeface="Calibri"/>
+                        </a:rPr>
+                        <a:t>-</a:t>
                       </a:r>
                     </a:p>
                   </a:txBody>
@@ -9605,7 +9660,7 @@
                           </a:solidFill>
                           <a:latin typeface="Calibri"/>
                         </a:rPr>
-                        <a:t>Remuneração</a:t>
+                        <a:t>Volume/VNU</a:t>
                       </a:r>
                     </a:p>
                   </a:txBody>
@@ -9652,29 +9707,29 @@
                           </a:solidFill>
                           <a:latin typeface="Calibri"/>
                         </a:rPr>
-                        <a:t>Ganho patrimonial por cash sweep; benchmark fixo</a:t>
-                      </a:r>
-                    </a:p>
-                    <a:p>
-                      <a:pPr algn="ctr">
-                        <a:lnSpc>
-                          <a:spcPct val="100000"/>
-                        </a:lnSpc>
-                        <a:spcBef>
-                          <a:spcPts val="0"/>
-                        </a:spcBef>
-                        <a:spcAft>
-                          <a:spcPts val="0"/>
-                        </a:spcAft>
-                      </a:pPr>
-                      <a:r>
-                        <a:rPr sz="1300" b="0">
-                          <a:solidFill>
-                            <a:srgbClr val="1F1F1F"/>
-                          </a:solidFill>
-                          <a:latin typeface="Calibri"/>
-                        </a:rPr>
-                        <a:t>não localizado no suplemento</a:t>
+                        <a:t>250 mil cotas; até R$ 250 mi; VNU inicial R$</a:t>
+                      </a:r>
+                    </a:p>
+                    <a:p>
+                      <a:pPr algn="ctr">
+                        <a:lnSpc>
+                          <a:spcPct val="100000"/>
+                        </a:lnSpc>
+                        <a:spcBef>
+                          <a:spcPts val="0"/>
+                        </a:spcBef>
+                        <a:spcAft>
+                          <a:spcPts val="0"/>
+                        </a:spcAft>
+                      </a:pPr>
+                      <a:r>
+                        <a:rPr sz="1300" b="0">
+                          <a:solidFill>
+                            <a:srgbClr val="1F1F1F"/>
+                          </a:solidFill>
+                          <a:latin typeface="Calibri"/>
+                        </a:rPr>
+                        <a:t>1.000</a:t>
                       </a:r>
                     </a:p>
                   </a:txBody>
@@ -9721,172 +9776,7 @@
                           </a:solidFill>
                           <a:latin typeface="Calibri"/>
                         </a:rPr>
-                        <a:t>Não localizado no corpus acessível</a:t>
-                      </a:r>
-                    </a:p>
-                  </a:txBody>
-                  <a:tcPr marL="91440" marR="91440" marT="41148" marB="41148" anchor="ctr">
-                    <a:solidFill>
-                      <a:srgbClr val="FFFFFF"/>
-                    </a:solidFill>
-                    <a:lnL>
-                      <a:noFill/>
-                    </a:lnL>
-                    <a:lnR>
-                      <a:noFill/>
-                    </a:lnR>
-                    <a:lnT>
-                      <a:noFill/>
-                    </a:lnT>
-                    <a:lnB>
-                      <a:noFill/>
-                    </a:lnB>
-                  </a:tcPr>
-                </a:tc>
-              </a:tr>
-              <a:tr h="470916">
-                <a:tc>
-                  <a:txBody>
-                    <a:bodyPr wrap="square">
-                      <a:noAutofit/>
-                    </a:bodyPr>
-                    <a:lstStyle/>
-                    <a:p>
-                      <a:pPr algn="l">
-                        <a:lnSpc>
-                          <a:spcPct val="100000"/>
-                        </a:lnSpc>
-                        <a:spcBef>
-                          <a:spcPts val="0"/>
-                        </a:spcBef>
-                        <a:spcAft>
-                          <a:spcPts val="0"/>
-                        </a:spcAft>
-                      </a:pPr>
-                      <a:r>
-                        <a:rPr sz="1300" b="1">
-                          <a:solidFill>
-                            <a:srgbClr val="1F1F1F"/>
-                          </a:solidFill>
-                          <a:latin typeface="Calibri"/>
-                        </a:rPr>
-                        <a:t>Volume/VNU</a:t>
-                      </a:r>
-                    </a:p>
-                  </a:txBody>
-                  <a:tcPr marL="91440" marR="91440" marT="41148" marB="41148" anchor="ctr">
-                    <a:solidFill>
-                      <a:srgbClr val="FFFFFF"/>
-                    </a:solidFill>
-                    <a:lnL>
-                      <a:noFill/>
-                    </a:lnL>
-                    <a:lnR>
-                      <a:noFill/>
-                    </a:lnR>
-                    <a:lnT>
-                      <a:noFill/>
-                    </a:lnT>
-                    <a:lnB>
-                      <a:noFill/>
-                    </a:lnB>
-                  </a:tcPr>
-                </a:tc>
-                <a:tc>
-                  <a:txBody>
-                    <a:bodyPr wrap="square">
-                      <a:noAutofit/>
-                    </a:bodyPr>
-                    <a:lstStyle/>
-                    <a:p>
-                      <a:pPr algn="ctr">
-                        <a:lnSpc>
-                          <a:spcPct val="100000"/>
-                        </a:lnSpc>
-                        <a:spcBef>
-                          <a:spcPts val="0"/>
-                        </a:spcBef>
-                        <a:spcAft>
-                          <a:spcPts val="0"/>
-                        </a:spcAft>
-                      </a:pPr>
-                      <a:r>
-                        <a:rPr sz="1300" b="0">
-                          <a:solidFill>
-                            <a:srgbClr val="1F1F1F"/>
-                          </a:solidFill>
-                          <a:latin typeface="Calibri"/>
-                        </a:rPr>
-                        <a:t>250 mil cotas; até R$ 250 mi; VNU inicial R$</a:t>
-                      </a:r>
-                    </a:p>
-                    <a:p>
-                      <a:pPr algn="ctr">
-                        <a:lnSpc>
-                          <a:spcPct val="100000"/>
-                        </a:lnSpc>
-                        <a:spcBef>
-                          <a:spcPts val="0"/>
-                        </a:spcBef>
-                        <a:spcAft>
-                          <a:spcPts val="0"/>
-                        </a:spcAft>
-                      </a:pPr>
-                      <a:r>
-                        <a:rPr sz="1300" b="0">
-                          <a:solidFill>
-                            <a:srgbClr val="1F1F1F"/>
-                          </a:solidFill>
-                          <a:latin typeface="Calibri"/>
-                        </a:rPr>
-                        <a:t>1.000</a:t>
-                      </a:r>
-                    </a:p>
-                  </a:txBody>
-                  <a:tcPr marL="91440" marR="91440" marT="41148" marB="41148" anchor="ctr">
-                    <a:solidFill>
-                      <a:srgbClr val="FFFFFF"/>
-                    </a:solidFill>
-                    <a:lnL>
-                      <a:noFill/>
-                    </a:lnL>
-                    <a:lnR>
-                      <a:noFill/>
-                    </a:lnR>
-                    <a:lnT>
-                      <a:noFill/>
-                    </a:lnT>
-                    <a:lnB>
-                      <a:noFill/>
-                    </a:lnB>
-                  </a:tcPr>
-                </a:tc>
-                <a:tc>
-                  <a:txBody>
-                    <a:bodyPr wrap="square">
-                      <a:noAutofit/>
-                    </a:bodyPr>
-                    <a:lstStyle/>
-                    <a:p>
-                      <a:pPr algn="ctr">
-                        <a:lnSpc>
-                          <a:spcPct val="100000"/>
-                        </a:lnSpc>
-                        <a:spcBef>
-                          <a:spcPts val="0"/>
-                        </a:spcBef>
-                        <a:spcAft>
-                          <a:spcPts val="0"/>
-                        </a:spcAft>
-                      </a:pPr>
-                      <a:r>
-                        <a:rPr sz="1300" b="0">
-                          <a:solidFill>
-                            <a:srgbClr val="1F1F1F"/>
-                          </a:solidFill>
-                          <a:latin typeface="Calibri"/>
-                        </a:rPr>
-                        <a:t>Não localizado no corpus acessível</a:t>
+                        <a:t>-</a:t>
                       </a:r>
                     </a:p>
                   </a:txBody>
@@ -10055,7 +9945,7 @@
                           </a:solidFill>
                           <a:latin typeface="Calibri"/>
                         </a:rPr>
-                        <a:t>Não localizado no corpus acessível</a:t>
+                        <a:t>-</a:t>
                       </a:r>
                     </a:p>
                   </a:txBody>
@@ -10225,7 +10115,7 @@
         </p:nvGraphicFramePr>
         <p:xfrm>
           <a:off x="438912" y="932688"/>
-          <a:ext cx="11313868" cy="3195825"/>
+          <a:ext cx="11313868" cy="2820922"/>
         </p:xfrm>
         <a:graphic>
           <a:graphicData uri="http://schemas.openxmlformats.org/drawingml/2006/table">
@@ -10262,7 +10152,7 @@
                       <a:r>
                         <a:rPr sz="1300" b="1">
                           <a:solidFill>
-                            <a:srgbClr val="1F1F1F"/>
+                            <a:srgbClr val="FFFFFF"/>
                           </a:solidFill>
                           <a:latin typeface="Calibri"/>
                         </a:rPr>
@@ -10272,7 +10162,7 @@
                   </a:txBody>
                   <a:tcPr marL="91440" marR="91440" marT="41148" marB="41148" anchor="ctr">
                     <a:solidFill>
-                      <a:srgbClr val="EC7000"/>
+                      <a:srgbClr val="FF6200"/>
                     </a:solidFill>
                     <a:lnL>
                       <a:noFill/>
@@ -10311,7 +10201,7 @@
                       <a:r>
                         <a:rPr sz="1300" b="1">
                           <a:solidFill>
-                            <a:srgbClr val="1F1F1F"/>
+                            <a:srgbClr val="FFFFFF"/>
                           </a:solidFill>
                           <a:latin typeface="Calibri"/>
                         </a:rPr>
@@ -10321,7 +10211,7 @@
                   </a:txBody>
                   <a:tcPr marL="91440" marR="91440" marT="41148" marB="41148" anchor="ctr">
                     <a:solidFill>
-                      <a:srgbClr val="EC7000"/>
+                      <a:srgbClr val="FF6200"/>
                     </a:solidFill>
                     <a:lnL>
                       <a:noFill/>
@@ -10360,7 +10250,7 @@
                       <a:r>
                         <a:rPr sz="1300" b="1">
                           <a:solidFill>
-                            <a:srgbClr val="1F1F1F"/>
+                            <a:srgbClr val="FFFFFF"/>
                           </a:solidFill>
                           <a:latin typeface="Calibri"/>
                         </a:rPr>
@@ -10370,7 +10260,7 @@
                   </a:txBody>
                   <a:tcPr marL="91440" marR="91440" marT="41148" marB="41148" anchor="ctr">
                     <a:solidFill>
-                      <a:srgbClr val="EC7000"/>
+                      <a:srgbClr val="FF6200"/>
                     </a:solidFill>
                     <a:lnL>
                       <a:noFill/>
@@ -10409,7 +10299,7 @@
                       <a:r>
                         <a:rPr sz="1300" b="1">
                           <a:solidFill>
-                            <a:srgbClr val="1F1F1F"/>
+                            <a:srgbClr val="FFFFFF"/>
                           </a:solidFill>
                           <a:latin typeface="Calibri"/>
                         </a:rPr>
@@ -10431,7 +10321,7 @@
                       <a:r>
                         <a:rPr sz="1300" b="1">
                           <a:solidFill>
-                            <a:srgbClr val="1F1F1F"/>
+                            <a:srgbClr val="FFFFFF"/>
                           </a:solidFill>
                           <a:latin typeface="Calibri"/>
                         </a:rPr>
@@ -10441,7 +10331,7 @@
                   </a:txBody>
                   <a:tcPr marL="91440" marR="91440" marT="41148" marB="41148" anchor="ctr">
                     <a:solidFill>
-                      <a:srgbClr val="EC7000"/>
+                      <a:srgbClr val="FF6200"/>
                     </a:solidFill>
                     <a:lnL>
                       <a:noFill/>
@@ -10480,7 +10370,7 @@
                       <a:r>
                         <a:rPr sz="1300" b="1">
                           <a:solidFill>
-                            <a:srgbClr val="1F1F1F"/>
+                            <a:srgbClr val="FFFFFF"/>
                           </a:solidFill>
                           <a:latin typeface="Calibri"/>
                         </a:rPr>
@@ -10502,7 +10392,7 @@
                       <a:r>
                         <a:rPr sz="1300" b="1">
                           <a:solidFill>
-                            <a:srgbClr val="1F1F1F"/>
+                            <a:srgbClr val="FFFFFF"/>
                           </a:solidFill>
                           <a:latin typeface="Calibri"/>
                         </a:rPr>
@@ -10512,7 +10402,7 @@
                   </a:txBody>
                   <a:tcPr marL="91440" marR="91440" marT="41148" marB="41148" anchor="ctr">
                     <a:solidFill>
-                      <a:srgbClr val="EC7000"/>
+                      <a:srgbClr val="FF6200"/>
                     </a:solidFill>
                     <a:lnL>
                       <a:noFill/>
@@ -10604,29 +10494,7 @@
                           </a:solidFill>
                           <a:latin typeface="Calibri"/>
                         </a:rPr>
-                        <a:t>Não localizado no</a:t>
-                      </a:r>
-                    </a:p>
-                    <a:p>
-                      <a:pPr algn="ctr">
-                        <a:lnSpc>
-                          <a:spcPct val="100000"/>
-                        </a:lnSpc>
-                        <a:spcBef>
-                          <a:spcPts val="0"/>
-                        </a:spcBef>
-                        <a:spcAft>
-                          <a:spcPts val="0"/>
-                        </a:spcAft>
-                      </a:pPr>
-                      <a:r>
-                        <a:rPr sz="1300" b="0">
-                          <a:solidFill>
-                            <a:srgbClr val="1F1F1F"/>
-                          </a:solidFill>
-                          <a:latin typeface="Calibri"/>
-                        </a:rPr>
-                        <a:t>corpus acessível</a:t>
+                        <a:t>-</a:t>
                       </a:r>
                     </a:p>
                   </a:txBody>
@@ -10786,29 +10654,7 @@
                           </a:solidFill>
                           <a:latin typeface="Calibri"/>
                         </a:rPr>
-                        <a:t>Não localizado no</a:t>
-                      </a:r>
-                    </a:p>
-                    <a:p>
-                      <a:pPr algn="ctr">
-                        <a:lnSpc>
-                          <a:spcPct val="100000"/>
-                        </a:lnSpc>
-                        <a:spcBef>
-                          <a:spcPts val="0"/>
-                        </a:spcBef>
-                        <a:spcAft>
-                          <a:spcPts val="0"/>
-                        </a:spcAft>
-                      </a:pPr>
-                      <a:r>
-                        <a:rPr sz="1300" b="0">
-                          <a:solidFill>
-                            <a:srgbClr val="1F1F1F"/>
-                          </a:solidFill>
-                          <a:latin typeface="Calibri"/>
-                        </a:rPr>
-                        <a:t>corpus acessível</a:t>
+                        <a:t>-</a:t>
                       </a:r>
                     </a:p>
                   </a:txBody>
@@ -10855,29 +10701,7 @@
                           </a:solidFill>
                           <a:latin typeface="Calibri"/>
                         </a:rPr>
-                        <a:t>Não localizado no</a:t>
-                      </a:r>
-                    </a:p>
-                    <a:p>
-                      <a:pPr algn="ctr">
-                        <a:lnSpc>
-                          <a:spcPct val="100000"/>
-                        </a:lnSpc>
-                        <a:spcBef>
-                          <a:spcPts val="0"/>
-                        </a:spcBef>
-                        <a:spcAft>
-                          <a:spcPts val="0"/>
-                        </a:spcAft>
-                      </a:pPr>
-                      <a:r>
-                        <a:rPr sz="1300" b="0">
-                          <a:solidFill>
-                            <a:srgbClr val="1F1F1F"/>
-                          </a:solidFill>
-                          <a:latin typeface="Calibri"/>
-                        </a:rPr>
-                        <a:t>corpus acessível</a:t>
+                        <a:t>-</a:t>
                       </a:r>
                     </a:p>
                   </a:txBody>
@@ -11017,29 +10841,7 @@
                           </a:solidFill>
                           <a:latin typeface="Calibri"/>
                         </a:rPr>
-                        <a:t>gestora; cronograma</a:t>
-                      </a:r>
-                    </a:p>
-                    <a:p>
-                      <a:pPr algn="ctr">
-                        <a:lnSpc>
-                          <a:spcPct val="100000"/>
-                        </a:lnSpc>
-                        <a:spcBef>
-                          <a:spcPts val="0"/>
-                        </a:spcBef>
-                        <a:spcAft>
-                          <a:spcPts val="0"/>
-                        </a:spcAft>
-                      </a:pPr>
-                      <a:r>
-                        <a:rPr sz="1300" b="0">
-                          <a:solidFill>
-                            <a:srgbClr val="1F1F1F"/>
-                          </a:solidFill>
-                          <a:latin typeface="Calibri"/>
-                        </a:rPr>
-                        <a:t>fixo não localizado</a:t>
+                        <a:t>gestora</a:t>
                       </a:r>
                     </a:p>
                   </a:txBody>
@@ -11243,51 +11045,7 @@
                           </a:solidFill>
                           <a:latin typeface="Calibri"/>
                         </a:rPr>
-                        <a:t>capital; cronograma de</a:t>
-                      </a:r>
-                    </a:p>
-                    <a:p>
-                      <a:pPr algn="ctr">
-                        <a:lnSpc>
-                          <a:spcPct val="100000"/>
-                        </a:lnSpc>
-                        <a:spcBef>
-                          <a:spcPts val="0"/>
-                        </a:spcBef>
-                        <a:spcAft>
-                          <a:spcPts val="0"/>
-                        </a:spcAft>
-                      </a:pPr>
-                      <a:r>
-                        <a:rPr sz="1300" b="0">
-                          <a:solidFill>
-                            <a:srgbClr val="1F1F1F"/>
-                          </a:solidFill>
-                          <a:latin typeface="Calibri"/>
-                        </a:rPr>
-                        <a:t>pagamento remetido ao</a:t>
-                      </a:r>
-                    </a:p>
-                    <a:p>
-                      <a:pPr algn="ctr">
-                        <a:lnSpc>
-                          <a:spcPct val="100000"/>
-                        </a:lnSpc>
-                        <a:spcBef>
-                          <a:spcPts val="0"/>
-                        </a:spcBef>
-                        <a:spcAft>
-                          <a:spcPts val="0"/>
-                        </a:spcAft>
-                      </a:pPr>
-                      <a:r>
-                        <a:rPr sz="1300" b="0">
-                          <a:solidFill>
-                            <a:srgbClr val="1F1F1F"/>
-                          </a:solidFill>
-                          <a:latin typeface="Calibri"/>
-                        </a:rPr>
-                        <a:t>apêndice</a:t>
+                        <a:t>capital</a:t>
                       </a:r>
                     </a:p>
                   </a:txBody>
@@ -11401,7 +11159,7 @@
                   </a:tcPr>
                 </a:tc>
               </a:tr>
-              <a:tr h="845819">
+              <a:tr h="470916">
                 <a:tc>
                   <a:txBody>
                     <a:bodyPr wrap="square">
@@ -11547,73 +11305,7 @@
                           </a:solidFill>
                           <a:latin typeface="Calibri"/>
                         </a:rPr>
-                        <a:t>Classe indeterminada;</a:t>
-                      </a:r>
-                    </a:p>
-                    <a:p>
-                      <a:pPr algn="ctr">
-                        <a:lnSpc>
-                          <a:spcPct val="100000"/>
-                        </a:lnSpc>
-                        <a:spcBef>
-                          <a:spcPts val="0"/>
-                        </a:spcBef>
-                        <a:spcAft>
-                          <a:spcPts val="0"/>
-                        </a:spcAft>
-                      </a:pPr>
-                      <a:r>
-                        <a:rPr sz="1300" b="0">
-                          <a:solidFill>
-                            <a:srgbClr val="1F1F1F"/>
-                          </a:solidFill>
-                          <a:latin typeface="Calibri"/>
-                        </a:rPr>
-                        <a:t>prazo final de cada</a:t>
-                      </a:r>
-                    </a:p>
-                    <a:p>
-                      <a:pPr algn="ctr">
-                        <a:lnSpc>
-                          <a:spcPct val="100000"/>
-                        </a:lnSpc>
-                        <a:spcBef>
-                          <a:spcPts val="0"/>
-                        </a:spcBef>
-                        <a:spcAft>
-                          <a:spcPts val="0"/>
-                        </a:spcAft>
-                      </a:pPr>
-                      <a:r>
-                        <a:rPr sz="1300" b="0">
-                          <a:solidFill>
-                            <a:srgbClr val="1F1F1F"/>
-                          </a:solidFill>
-                          <a:latin typeface="Calibri"/>
-                        </a:rPr>
-                        <a:t>série remetido ao</a:t>
-                      </a:r>
-                    </a:p>
-                    <a:p>
-                      <a:pPr algn="ctr">
-                        <a:lnSpc>
-                          <a:spcPct val="100000"/>
-                        </a:lnSpc>
-                        <a:spcBef>
-                          <a:spcPts val="0"/>
-                        </a:spcBef>
-                        <a:spcAft>
-                          <a:spcPts val="0"/>
-                        </a:spcAft>
-                      </a:pPr>
-                      <a:r>
-                        <a:rPr sz="1300" b="0">
-                          <a:solidFill>
-                            <a:srgbClr val="1F1F1F"/>
-                          </a:solidFill>
-                          <a:latin typeface="Calibri"/>
-                        </a:rPr>
-                        <a:t>suplemento</a:t>
+                        <a:t>Classe indeterminada</a:t>
                       </a:r>
                     </a:p>
                   </a:txBody>
@@ -11662,29 +11354,7 @@
                           </a:solidFill>
                           <a:latin typeface="Calibri"/>
                         </a:rPr>
-                        <a:t>Não localizado no</a:t>
-                      </a:r>
-                    </a:p>
-                    <a:p>
-                      <a:pPr algn="ctr">
-                        <a:lnSpc>
-                          <a:spcPct val="100000"/>
-                        </a:lnSpc>
-                        <a:spcBef>
-                          <a:spcPts val="0"/>
-                        </a:spcBef>
-                        <a:spcAft>
-                          <a:spcPts val="0"/>
-                        </a:spcAft>
-                      </a:pPr>
-                      <a:r>
-                        <a:rPr sz="1300" b="0">
-                          <a:solidFill>
-                            <a:srgbClr val="1F1F1F"/>
-                          </a:solidFill>
-                          <a:latin typeface="Calibri"/>
-                        </a:rPr>
-                        <a:t>corpus acessível</a:t>
+                        <a:t>-</a:t>
                       </a:r>
                     </a:p>
                   </a:txBody>
@@ -11733,29 +11403,7 @@
                           </a:solidFill>
                           <a:latin typeface="Calibri"/>
                         </a:rPr>
-                        <a:t>Não localizado no</a:t>
-                      </a:r>
-                    </a:p>
-                    <a:p>
-                      <a:pPr algn="ctr">
-                        <a:lnSpc>
-                          <a:spcPct val="100000"/>
-                        </a:lnSpc>
-                        <a:spcBef>
-                          <a:spcPts val="0"/>
-                        </a:spcBef>
-                        <a:spcAft>
-                          <a:spcPts val="0"/>
-                        </a:spcAft>
-                      </a:pPr>
-                      <a:r>
-                        <a:rPr sz="1300" b="0">
-                          <a:solidFill>
-                            <a:srgbClr val="1F1F1F"/>
-                          </a:solidFill>
-                          <a:latin typeface="Calibri"/>
-                        </a:rPr>
-                        <a:t>corpus acessível</a:t>
+                        <a:t>-</a:t>
                       </a:r>
                     </a:p>
                   </a:txBody>
@@ -11960,7 +11608,7 @@
                       <a:r>
                         <a:rPr sz="1300" b="1">
                           <a:solidFill>
-                            <a:srgbClr val="1F1F1F"/>
+                            <a:srgbClr val="FFFFFF"/>
                           </a:solidFill>
                           <a:latin typeface="Calibri"/>
                         </a:rPr>
@@ -11970,7 +11618,7 @@
                   </a:txBody>
                   <a:tcPr marL="91440" marR="91440" marT="41148" marB="41148" anchor="ctr">
                     <a:solidFill>
-                      <a:srgbClr val="EC7000"/>
+                      <a:srgbClr val="FF6200"/>
                     </a:solidFill>
                     <a:lnL>
                       <a:noFill/>
@@ -12009,7 +11657,7 @@
                       <a:r>
                         <a:rPr sz="1300" b="1">
                           <a:solidFill>
-                            <a:srgbClr val="1F1F1F"/>
+                            <a:srgbClr val="FFFFFF"/>
                           </a:solidFill>
                           <a:latin typeface="Calibri"/>
                         </a:rPr>
@@ -12019,7 +11667,7 @@
                   </a:txBody>
                   <a:tcPr marL="91440" marR="91440" marT="41148" marB="41148" anchor="ctr">
                     <a:solidFill>
-                      <a:srgbClr val="EC7000"/>
+                      <a:srgbClr val="FF6200"/>
                     </a:solidFill>
                     <a:lnL>
                       <a:noFill/>
@@ -12058,7 +11706,7 @@
                       <a:r>
                         <a:rPr sz="1300" b="1">
                           <a:solidFill>
-                            <a:srgbClr val="1F1F1F"/>
+                            <a:srgbClr val="FFFFFF"/>
                           </a:solidFill>
                           <a:latin typeface="Calibri"/>
                         </a:rPr>
@@ -12068,7 +11716,7 @@
                   </a:txBody>
                   <a:tcPr marL="91440" marR="91440" marT="41148" marB="41148" anchor="ctr">
                     <a:solidFill>
-                      <a:srgbClr val="EC7000"/>
+                      <a:srgbClr val="FF6200"/>
                     </a:solidFill>
                     <a:lnL>
                       <a:noFill/>
@@ -12160,7 +11808,7 @@
                           </a:solidFill>
                           <a:latin typeface="Calibri"/>
                         </a:rPr>
-                        <a:t>Não localizado no corpus acessível</a:t>
+                        <a:t>-</a:t>
                       </a:r>
                     </a:p>
                   </a:txBody>
@@ -12207,7 +11855,7 @@
                           </a:solidFill>
                           <a:latin typeface="Calibri"/>
                         </a:rPr>
-                        <a:t>Não localizado no corpus acessível</a:t>
+                        <a:t>-</a:t>
                       </a:r>
                     </a:p>
                   </a:txBody>
@@ -12372,7 +12020,7 @@
                           </a:solidFill>
                           <a:latin typeface="Calibri"/>
                         </a:rPr>
-                        <a:t>Não localizado no corpus acessível</a:t>
+                        <a:t>-</a:t>
                       </a:r>
                     </a:p>
                   </a:txBody>
@@ -12541,7 +12189,7 @@
                           </a:solidFill>
                           <a:latin typeface="Calibri"/>
                         </a:rPr>
-                        <a:t>Não localizado no corpus acessível</a:t>
+                        <a:t>-</a:t>
                       </a:r>
                     </a:p>
                   </a:txBody>
@@ -12748,7 +12396,7 @@
                       <a:r>
                         <a:rPr sz="1300" b="1">
                           <a:solidFill>
-                            <a:srgbClr val="1F1F1F"/>
+                            <a:srgbClr val="FFFFFF"/>
                           </a:solidFill>
                           <a:latin typeface="Calibri"/>
                         </a:rPr>
@@ -12758,7 +12406,7 @@
                   </a:txBody>
                   <a:tcPr marL="91440" marR="91440" marT="41148" marB="41148" anchor="ctr">
                     <a:solidFill>
-                      <a:srgbClr val="EC7000"/>
+                      <a:srgbClr val="FF6200"/>
                     </a:solidFill>
                     <a:lnL>
                       <a:noFill/>
@@ -12797,7 +12445,7 @@
                       <a:r>
                         <a:rPr sz="1300" b="1">
                           <a:solidFill>
-                            <a:srgbClr val="1F1F1F"/>
+                            <a:srgbClr val="FFFFFF"/>
                           </a:solidFill>
                           <a:latin typeface="Calibri"/>
                         </a:rPr>
@@ -12807,7 +12455,7 @@
                   </a:txBody>
                   <a:tcPr marL="91440" marR="91440" marT="41148" marB="41148" anchor="ctr">
                     <a:solidFill>
-                      <a:srgbClr val="EC7000"/>
+                      <a:srgbClr val="FF6200"/>
                     </a:solidFill>
                     <a:lnL>
                       <a:noFill/>
@@ -12846,7 +12494,7 @@
                       <a:r>
                         <a:rPr sz="1300" b="1">
                           <a:solidFill>
-                            <a:srgbClr val="1F1F1F"/>
+                            <a:srgbClr val="FFFFFF"/>
                           </a:solidFill>
                           <a:latin typeface="Calibri"/>
                         </a:rPr>
@@ -12856,7 +12504,7 @@
                   </a:txBody>
                   <a:tcPr marL="91440" marR="91440" marT="41148" marB="41148" anchor="ctr">
                     <a:solidFill>
-                      <a:srgbClr val="EC7000"/>
+                      <a:srgbClr val="FF6200"/>
                     </a:solidFill>
                     <a:lnL>
                       <a:noFill/>
@@ -12895,7 +12543,7 @@
                       <a:r>
                         <a:rPr sz="1300" b="1">
                           <a:solidFill>
-                            <a:srgbClr val="1F1F1F"/>
+                            <a:srgbClr val="FFFFFF"/>
                           </a:solidFill>
                           <a:latin typeface="Calibri"/>
                         </a:rPr>
@@ -12917,7 +12565,7 @@
                       <a:r>
                         <a:rPr sz="1300" b="1">
                           <a:solidFill>
-                            <a:srgbClr val="1F1F1F"/>
+                            <a:srgbClr val="FFFFFF"/>
                           </a:solidFill>
                           <a:latin typeface="Calibri"/>
                         </a:rPr>
@@ -12927,7 +12575,7 @@
                   </a:txBody>
                   <a:tcPr marL="91440" marR="91440" marT="41148" marB="41148" anchor="ctr">
                     <a:solidFill>
-                      <a:srgbClr val="EC7000"/>
+                      <a:srgbClr val="FF6200"/>
                     </a:solidFill>
                     <a:lnL>
                       <a:noFill/>
@@ -12966,7 +12614,7 @@
                       <a:r>
                         <a:rPr sz="1300" b="1">
                           <a:solidFill>
-                            <a:srgbClr val="1F1F1F"/>
+                            <a:srgbClr val="FFFFFF"/>
                           </a:solidFill>
                           <a:latin typeface="Calibri"/>
                         </a:rPr>
@@ -12988,7 +12636,7 @@
                       <a:r>
                         <a:rPr sz="1300" b="1">
                           <a:solidFill>
-                            <a:srgbClr val="1F1F1F"/>
+                            <a:srgbClr val="FFFFFF"/>
                           </a:solidFill>
                           <a:latin typeface="Calibri"/>
                         </a:rPr>
@@ -12998,7 +12646,7 @@
                   </a:txBody>
                   <a:tcPr marL="91440" marR="91440" marT="41148" marB="41148" anchor="ctr">
                     <a:solidFill>
-                      <a:srgbClr val="EC7000"/>
+                      <a:srgbClr val="FF6200"/>
                     </a:solidFill>
                     <a:lnL>
                       <a:noFill/>
@@ -13294,29 +12942,7 @@
                           </a:solidFill>
                           <a:latin typeface="Calibri"/>
                         </a:rPr>
-                        <a:t>Não localizado no</a:t>
-                      </a:r>
-                    </a:p>
-                    <a:p>
-                      <a:pPr algn="ctr">
-                        <a:lnSpc>
-                          <a:spcPct val="100000"/>
-                        </a:lnSpc>
-                        <a:spcBef>
-                          <a:spcPts val="0"/>
-                        </a:spcBef>
-                        <a:spcAft>
-                          <a:spcPts val="0"/>
-                        </a:spcAft>
-                      </a:pPr>
-                      <a:r>
-                        <a:rPr sz="1300" b="0">
-                          <a:solidFill>
-                            <a:srgbClr val="1F1F1F"/>
-                          </a:solidFill>
-                          <a:latin typeface="Calibri"/>
-                        </a:rPr>
-                        <a:t>corpus acessível</a:t>
+                        <a:t>-</a:t>
                       </a:r>
                     </a:p>
                   </a:txBody>
@@ -13638,51 +13264,7 @@
                           </a:solidFill>
                           <a:latin typeface="Calibri"/>
                         </a:rPr>
-                        <a:t>administração de 0,40%;</a:t>
-                      </a:r>
-                    </a:p>
-                    <a:p>
-                      <a:pPr algn="ctr">
-                        <a:lnSpc>
-                          <a:spcPct val="100000"/>
-                        </a:lnSpc>
-                        <a:spcBef>
-                          <a:spcPts val="0"/>
-                        </a:spcBef>
-                        <a:spcAft>
-                          <a:spcPts val="0"/>
-                        </a:spcAft>
-                      </a:pPr>
-                      <a:r>
-                        <a:rPr sz="1300" b="0">
-                          <a:solidFill>
-                            <a:srgbClr val="1F1F1F"/>
-                          </a:solidFill>
-                          <a:latin typeface="Calibri"/>
-                        </a:rPr>
-                        <a:t>parcela individual não</a:t>
-                      </a:r>
-                    </a:p>
-                    <a:p>
-                      <a:pPr algn="ctr">
-                        <a:lnSpc>
-                          <a:spcPct val="100000"/>
-                        </a:lnSpc>
-                        <a:spcBef>
-                          <a:spcPts val="0"/>
-                        </a:spcBef>
-                        <a:spcAft>
-                          <a:spcPts val="0"/>
-                        </a:spcAft>
-                      </a:pPr>
-                      <a:r>
-                        <a:rPr sz="1300" b="0">
-                          <a:solidFill>
-                            <a:srgbClr val="1F1F1F"/>
-                          </a:solidFill>
-                          <a:latin typeface="Calibri"/>
-                        </a:rPr>
-                        <a:t>especificada</a:t>
+                        <a:t>administração de 0,40%</a:t>
                       </a:r>
                     </a:p>
                   </a:txBody>
@@ -13729,29 +13311,7 @@
                           </a:solidFill>
                           <a:latin typeface="Calibri"/>
                         </a:rPr>
-                        <a:t>Não localizado no</a:t>
-                      </a:r>
-                    </a:p>
-                    <a:p>
-                      <a:pPr algn="ctr">
-                        <a:lnSpc>
-                          <a:spcPct val="100000"/>
-                        </a:lnSpc>
-                        <a:spcBef>
-                          <a:spcPts val="0"/>
-                        </a:spcBef>
-                        <a:spcAft>
-                          <a:spcPts val="0"/>
-                        </a:spcAft>
-                      </a:pPr>
-                      <a:r>
-                        <a:rPr sz="1300" b="0">
-                          <a:solidFill>
-                            <a:srgbClr val="1F1F1F"/>
-                          </a:solidFill>
-                          <a:latin typeface="Calibri"/>
-                        </a:rPr>
-                        <a:t>corpus acessível</a:t>
+                        <a:t>-</a:t>
                       </a:r>
                     </a:p>
                   </a:txBody>
@@ -14148,29 +13708,7 @@
                           </a:solidFill>
                           <a:latin typeface="Calibri"/>
                         </a:rPr>
-                        <a:t>Não localizado no</a:t>
-                      </a:r>
-                    </a:p>
-                    <a:p>
-                      <a:pPr algn="ctr">
-                        <a:lnSpc>
-                          <a:spcPct val="100000"/>
-                        </a:lnSpc>
-                        <a:spcBef>
-                          <a:spcPts val="0"/>
-                        </a:spcBef>
-                        <a:spcAft>
-                          <a:spcPts val="0"/>
-                        </a:spcAft>
-                      </a:pPr>
-                      <a:r>
-                        <a:rPr sz="1300" b="0">
-                          <a:solidFill>
-                            <a:srgbClr val="1F1F1F"/>
-                          </a:solidFill>
-                          <a:latin typeface="Calibri"/>
-                        </a:rPr>
-                        <a:t>corpus acessível</a:t>
+                        <a:t>-</a:t>
                       </a:r>
                     </a:p>
                   </a:txBody>
@@ -14424,7 +13962,7 @@
                       <a:r>
                         <a:rPr sz="1300" b="1">
                           <a:solidFill>
-                            <a:srgbClr val="1F1F1F"/>
+                            <a:srgbClr val="FFFFFF"/>
                           </a:solidFill>
                           <a:latin typeface="Calibri"/>
                         </a:rPr>
@@ -14434,7 +13972,7 @@
                   </a:txBody>
                   <a:tcPr marL="91440" marR="91440" marT="41148" marB="41148" anchor="ctr">
                     <a:solidFill>
-                      <a:srgbClr val="EC7000"/>
+                      <a:srgbClr val="FF6200"/>
                     </a:solidFill>
                     <a:lnL>
                       <a:noFill/>
@@ -14473,7 +14011,7 @@
                       <a:r>
                         <a:rPr sz="1300" b="1">
                           <a:solidFill>
-                            <a:srgbClr val="1F1F1F"/>
+                            <a:srgbClr val="FFFFFF"/>
                           </a:solidFill>
                           <a:latin typeface="Calibri"/>
                         </a:rPr>
@@ -14483,7 +14021,7 @@
                   </a:txBody>
                   <a:tcPr marL="91440" marR="91440" marT="41148" marB="41148" anchor="ctr">
                     <a:solidFill>
-                      <a:srgbClr val="EC7000"/>
+                      <a:srgbClr val="FF6200"/>
                     </a:solidFill>
                     <a:lnL>
                       <a:noFill/>
@@ -14522,7 +14060,7 @@
                       <a:r>
                         <a:rPr sz="1300" b="1">
                           <a:solidFill>
-                            <a:srgbClr val="1F1F1F"/>
+                            <a:srgbClr val="FFFFFF"/>
                           </a:solidFill>
                           <a:latin typeface="Calibri"/>
                         </a:rPr>
@@ -14532,7 +14070,7 @@
                   </a:txBody>
                   <a:tcPr marL="91440" marR="91440" marT="41148" marB="41148" anchor="ctr">
                     <a:solidFill>
-                      <a:srgbClr val="EC7000"/>
+                      <a:srgbClr val="FF6200"/>
                     </a:solidFill>
                     <a:lnL>
                       <a:noFill/>
@@ -14624,7 +14162,7 @@
                           </a:solidFill>
                           <a:latin typeface="Calibri"/>
                         </a:rPr>
-                        <a:t>Não localizado no corpus acessível</a:t>
+                        <a:t>-</a:t>
                       </a:r>
                     </a:p>
                   </a:txBody>
@@ -14671,7 +14209,7 @@
                           </a:solidFill>
                           <a:latin typeface="Calibri"/>
                         </a:rPr>
-                        <a:t>Não localizado no corpus acessível</a:t>
+                        <a:t>-</a:t>
                       </a:r>
                     </a:p>
                   </a:txBody>
@@ -14767,7 +14305,7 @@
                           </a:solidFill>
                           <a:latin typeface="Calibri"/>
                         </a:rPr>
-                        <a:t>Não localizado no corpus acessível</a:t>
+                        <a:t>-</a:t>
                       </a:r>
                     </a:p>
                   </a:txBody>
@@ -14814,7 +14352,7 @@
                           </a:solidFill>
                           <a:latin typeface="Calibri"/>
                         </a:rPr>
-                        <a:t>Não localizado no corpus acessível</a:t>
+                        <a:t>-</a:t>
                       </a:r>
                     </a:p>
                   </a:txBody>
@@ -14912,7 +14450,7 @@
                           </a:solidFill>
                           <a:latin typeface="Calibri"/>
                         </a:rPr>
-                        <a:t>Não localizado no corpus acessível</a:t>
+                        <a:t>-</a:t>
                       </a:r>
                     </a:p>
                   </a:txBody>
@@ -14961,7 +14499,7 @@
                           </a:solidFill>
                           <a:latin typeface="Calibri"/>
                         </a:rPr>
-                        <a:t>Não localizado no corpus acessível</a:t>
+                        <a:t>-</a:t>
                       </a:r>
                     </a:p>
                   </a:txBody>
@@ -15168,7 +14706,7 @@
                       <a:r>
                         <a:rPr sz="1300" b="1">
                           <a:solidFill>
-                            <a:srgbClr val="1F1F1F"/>
+                            <a:srgbClr val="FFFFFF"/>
                           </a:solidFill>
                           <a:latin typeface="Calibri"/>
                         </a:rPr>
@@ -15178,7 +14716,7 @@
                   </a:txBody>
                   <a:tcPr marL="91440" marR="91440" marT="41148" marB="41148" anchor="ctr">
                     <a:solidFill>
-                      <a:srgbClr val="EC7000"/>
+                      <a:srgbClr val="FF6200"/>
                     </a:solidFill>
                     <a:lnL>
                       <a:noFill/>
@@ -15217,7 +14755,7 @@
                       <a:r>
                         <a:rPr sz="1300" b="1">
                           <a:solidFill>
-                            <a:srgbClr val="1F1F1F"/>
+                            <a:srgbClr val="FFFFFF"/>
                           </a:solidFill>
                           <a:latin typeface="Calibri"/>
                         </a:rPr>
@@ -15227,7 +14765,7 @@
                   </a:txBody>
                   <a:tcPr marL="91440" marR="91440" marT="41148" marB="41148" anchor="ctr">
                     <a:solidFill>
-                      <a:srgbClr val="EC7000"/>
+                      <a:srgbClr val="FF6200"/>
                     </a:solidFill>
                     <a:lnL>
                       <a:noFill/>
@@ -15266,7 +14804,7 @@
                       <a:r>
                         <a:rPr sz="1300" b="1">
                           <a:solidFill>
-                            <a:srgbClr val="1F1F1F"/>
+                            <a:srgbClr val="FFFFFF"/>
                           </a:solidFill>
                           <a:latin typeface="Calibri"/>
                         </a:rPr>
@@ -15276,7 +14814,7 @@
                   </a:txBody>
                   <a:tcPr marL="91440" marR="91440" marT="41148" marB="41148" anchor="ctr">
                     <a:solidFill>
-                      <a:srgbClr val="EC7000"/>
+                      <a:srgbClr val="FF6200"/>
                     </a:solidFill>
                     <a:lnL>
                       <a:noFill/>
@@ -15315,7 +14853,7 @@
                       <a:r>
                         <a:rPr sz="1300" b="1">
                           <a:solidFill>
-                            <a:srgbClr val="1F1F1F"/>
+                            <a:srgbClr val="FFFFFF"/>
                           </a:solidFill>
                           <a:latin typeface="Calibri"/>
                         </a:rPr>
@@ -15337,7 +14875,7 @@
                       <a:r>
                         <a:rPr sz="1300" b="1">
                           <a:solidFill>
-                            <a:srgbClr val="1F1F1F"/>
+                            <a:srgbClr val="FFFFFF"/>
                           </a:solidFill>
                           <a:latin typeface="Calibri"/>
                         </a:rPr>
@@ -15347,7 +14885,7 @@
                   </a:txBody>
                   <a:tcPr marL="91440" marR="91440" marT="41148" marB="41148" anchor="ctr">
                     <a:solidFill>
-                      <a:srgbClr val="EC7000"/>
+                      <a:srgbClr val="FF6200"/>
                     </a:solidFill>
                     <a:lnL>
                       <a:noFill/>
@@ -15386,7 +14924,7 @@
                       <a:r>
                         <a:rPr sz="1300" b="1">
                           <a:solidFill>
-                            <a:srgbClr val="1F1F1F"/>
+                            <a:srgbClr val="FFFFFF"/>
                           </a:solidFill>
                           <a:latin typeface="Calibri"/>
                         </a:rPr>
@@ -15408,7 +14946,7 @@
                       <a:r>
                         <a:rPr sz="1300" b="1">
                           <a:solidFill>
-                            <a:srgbClr val="1F1F1F"/>
+                            <a:srgbClr val="FFFFFF"/>
                           </a:solidFill>
                           <a:latin typeface="Calibri"/>
                         </a:rPr>
@@ -15418,7 +14956,7 @@
                   </a:txBody>
                   <a:tcPr marL="91440" marR="91440" marT="41148" marB="41148" anchor="ctr">
                     <a:solidFill>
-                      <a:srgbClr val="EC7000"/>
+                      <a:srgbClr val="FF6200"/>
                     </a:solidFill>
                     <a:lnL>
                       <a:noFill/>
@@ -15780,29 +15318,7 @@
                           </a:solidFill>
                           <a:latin typeface="Calibri"/>
                         </a:rPr>
-                        <a:t>Não localizado no</a:t>
-                      </a:r>
-                    </a:p>
-                    <a:p>
-                      <a:pPr algn="ctr">
-                        <a:lnSpc>
-                          <a:spcPct val="100000"/>
-                        </a:lnSpc>
-                        <a:spcBef>
-                          <a:spcPts val="0"/>
-                        </a:spcBef>
-                        <a:spcAft>
-                          <a:spcPts val="0"/>
-                        </a:spcAft>
-                      </a:pPr>
-                      <a:r>
-                        <a:rPr sz="1300" b="0">
-                          <a:solidFill>
-                            <a:srgbClr val="1F1F1F"/>
-                          </a:solidFill>
-                          <a:latin typeface="Calibri"/>
-                        </a:rPr>
-                        <a:t>corpus acessível</a:t>
+                        <a:t>-</a:t>
                       </a:r>
                     </a:p>
                   </a:txBody>
@@ -16259,29 +15775,7 @@
                           </a:solidFill>
                           <a:latin typeface="Calibri"/>
                         </a:rPr>
-                        <a:t>Não localizado no</a:t>
-                      </a:r>
-                    </a:p>
-                    <a:p>
-                      <a:pPr algn="ctr">
-                        <a:lnSpc>
-                          <a:spcPct val="100000"/>
-                        </a:lnSpc>
-                        <a:spcBef>
-                          <a:spcPts val="0"/>
-                        </a:spcBef>
-                        <a:spcAft>
-                          <a:spcPts val="0"/>
-                        </a:spcAft>
-                      </a:pPr>
-                      <a:r>
-                        <a:rPr sz="1300" b="0">
-                          <a:solidFill>
-                            <a:srgbClr val="1F1F1F"/>
-                          </a:solidFill>
-                          <a:latin typeface="Calibri"/>
-                        </a:rPr>
-                        <a:t>corpus acessível</a:t>
+                        <a:t>-</a:t>
                       </a:r>
                     </a:p>
                   </a:txBody>
@@ -17631,7 +17125,7 @@
                       <a:r>
                         <a:rPr sz="1300" b="1">
                           <a:solidFill>
-                            <a:srgbClr val="1F1F1F"/>
+                            <a:srgbClr val="FFFFFF"/>
                           </a:solidFill>
                           <a:latin typeface="Calibri"/>
                         </a:rPr>
@@ -17641,7 +17135,7 @@
                   </a:txBody>
                   <a:tcPr marL="91440" marR="91440" marT="41148" marB="41148" anchor="ctr">
                     <a:solidFill>
-                      <a:srgbClr val="EC7000"/>
+                      <a:srgbClr val="FF6200"/>
                     </a:solidFill>
                     <a:lnL>
                       <a:noFill/>
@@ -17680,7 +17174,7 @@
                       <a:r>
                         <a:rPr sz="1300" b="1">
                           <a:solidFill>
-                            <a:srgbClr val="1F1F1F"/>
+                            <a:srgbClr val="FFFFFF"/>
                           </a:solidFill>
                           <a:latin typeface="Calibri"/>
                         </a:rPr>
@@ -17690,7 +17184,7 @@
                   </a:txBody>
                   <a:tcPr marL="91440" marR="91440" marT="41148" marB="41148" anchor="ctr">
                     <a:solidFill>
-                      <a:srgbClr val="EC7000"/>
+                      <a:srgbClr val="FF6200"/>
                     </a:solidFill>
                     <a:lnL>
                       <a:noFill/>
@@ -17729,7 +17223,7 @@
                       <a:r>
                         <a:rPr sz="1300" b="1">
                           <a:solidFill>
-                            <a:srgbClr val="1F1F1F"/>
+                            <a:srgbClr val="FFFFFF"/>
                           </a:solidFill>
                           <a:latin typeface="Calibri"/>
                         </a:rPr>
@@ -17739,7 +17233,7 @@
                   </a:txBody>
                   <a:tcPr marL="91440" marR="91440" marT="41148" marB="41148" anchor="ctr">
                     <a:solidFill>
-                      <a:srgbClr val="EC7000"/>
+                      <a:srgbClr val="FF6200"/>
                     </a:solidFill>
                     <a:lnL>
                       <a:noFill/>
@@ -17853,7 +17347,7 @@
                           </a:solidFill>
                           <a:latin typeface="Calibri"/>
                         </a:rPr>
-                        <a:t>Não localizado no corpus acessível</a:t>
+                        <a:t>-</a:t>
                       </a:r>
                     </a:p>
                   </a:txBody>
@@ -17900,7 +17394,7 @@
                           </a:solidFill>
                           <a:latin typeface="Calibri"/>
                         </a:rPr>
-                        <a:t>Não localizado no corpus acessível</a:t>
+                        <a:t>-</a:t>
                       </a:r>
                     </a:p>
                   </a:txBody>
@@ -17996,7 +17490,7 @@
                           </a:solidFill>
                           <a:latin typeface="Calibri"/>
                         </a:rPr>
-                        <a:t>Não localizado no corpus acessível</a:t>
+                        <a:t>-</a:t>
                       </a:r>
                     </a:p>
                   </a:txBody>
@@ -18043,7 +17537,7 @@
                           </a:solidFill>
                           <a:latin typeface="Calibri"/>
                         </a:rPr>
-                        <a:t>Não localizado no corpus acessível</a:t>
+                        <a:t>-</a:t>
                       </a:r>
                     </a:p>
                   </a:txBody>
@@ -18628,7 +18122,7 @@
                       <a:r>
                         <a:rPr sz="1300" b="1">
                           <a:solidFill>
-                            <a:srgbClr val="1F1F1F"/>
+                            <a:srgbClr val="FFFFFF"/>
                           </a:solidFill>
                           <a:latin typeface="Calibri"/>
                         </a:rPr>
@@ -18638,7 +18132,7 @@
                   </a:txBody>
                   <a:tcPr marL="91440" marR="91440" marT="41148" marB="41148" anchor="ctr">
                     <a:solidFill>
-                      <a:srgbClr val="EC7000"/>
+                      <a:srgbClr val="FF6200"/>
                     </a:solidFill>
                     <a:lnL>
                       <a:noFill/>
@@ -18677,7 +18171,7 @@
                       <a:r>
                         <a:rPr sz="1300" b="1">
                           <a:solidFill>
-                            <a:srgbClr val="1F1F1F"/>
+                            <a:srgbClr val="FFFFFF"/>
                           </a:solidFill>
                           <a:latin typeface="Calibri"/>
                         </a:rPr>
@@ -18687,7 +18181,7 @@
                   </a:txBody>
                   <a:tcPr marL="91440" marR="91440" marT="41148" marB="41148" anchor="ctr">
                     <a:solidFill>
-                      <a:srgbClr val="EC7000"/>
+                      <a:srgbClr val="FF6200"/>
                     </a:solidFill>
                     <a:lnL>
                       <a:noFill/>
@@ -18726,7 +18220,7 @@
                       <a:r>
                         <a:rPr sz="1300" b="1">
                           <a:solidFill>
-                            <a:srgbClr val="1F1F1F"/>
+                            <a:srgbClr val="FFFFFF"/>
                           </a:solidFill>
                           <a:latin typeface="Calibri"/>
                         </a:rPr>
@@ -18736,7 +18230,7 @@
                   </a:txBody>
                   <a:tcPr marL="91440" marR="91440" marT="41148" marB="41148" anchor="ctr">
                     <a:solidFill>
-                      <a:srgbClr val="EC7000"/>
+                      <a:srgbClr val="FF6200"/>
                     </a:solidFill>
                     <a:lnL>
                       <a:noFill/>
@@ -18775,7 +18269,7 @@
                       <a:r>
                         <a:rPr sz="1300" b="1">
                           <a:solidFill>
-                            <a:srgbClr val="1F1F1F"/>
+                            <a:srgbClr val="FFFFFF"/>
                           </a:solidFill>
                           <a:latin typeface="Calibri"/>
                         </a:rPr>
@@ -18797,7 +18291,7 @@
                       <a:r>
                         <a:rPr sz="1300" b="1">
                           <a:solidFill>
-                            <a:srgbClr val="1F1F1F"/>
+                            <a:srgbClr val="FFFFFF"/>
                           </a:solidFill>
                           <a:latin typeface="Calibri"/>
                         </a:rPr>
@@ -18807,7 +18301,7 @@
                   </a:txBody>
                   <a:tcPr marL="91440" marR="91440" marT="41148" marB="41148" anchor="ctr">
                     <a:solidFill>
-                      <a:srgbClr val="EC7000"/>
+                      <a:srgbClr val="FF6200"/>
                     </a:solidFill>
                     <a:lnL>
                       <a:noFill/>
@@ -18846,7 +18340,7 @@
                       <a:r>
                         <a:rPr sz="1300" b="1">
                           <a:solidFill>
-                            <a:srgbClr val="1F1F1F"/>
+                            <a:srgbClr val="FFFFFF"/>
                           </a:solidFill>
                           <a:latin typeface="Calibri"/>
                         </a:rPr>
@@ -18868,7 +18362,7 @@
                       <a:r>
                         <a:rPr sz="1300" b="1">
                           <a:solidFill>
-                            <a:srgbClr val="1F1F1F"/>
+                            <a:srgbClr val="FFFFFF"/>
                           </a:solidFill>
                           <a:latin typeface="Calibri"/>
                         </a:rPr>
@@ -18878,7 +18372,7 @@
                   </a:txBody>
                   <a:tcPr marL="91440" marR="91440" marT="41148" marB="41148" anchor="ctr">
                     <a:solidFill>
-                      <a:srgbClr val="EC7000"/>
+                      <a:srgbClr val="FF6200"/>
                     </a:solidFill>
                     <a:lnL>
                       <a:noFill/>
@@ -19174,29 +18668,7 @@
                           </a:solidFill>
                           <a:latin typeface="Calibri"/>
                         </a:rPr>
-                        <a:t>Não localizado no</a:t>
-                      </a:r>
-                    </a:p>
-                    <a:p>
-                      <a:pPr algn="ctr">
-                        <a:lnSpc>
-                          <a:spcPct val="100000"/>
-                        </a:lnSpc>
-                        <a:spcBef>
-                          <a:spcPts val="0"/>
-                        </a:spcBef>
-                        <a:spcAft>
-                          <a:spcPts val="0"/>
-                        </a:spcAft>
-                      </a:pPr>
-                      <a:r>
-                        <a:rPr sz="1300" b="0">
-                          <a:solidFill>
-                            <a:srgbClr val="1F1F1F"/>
-                          </a:solidFill>
-                          <a:latin typeface="Calibri"/>
-                        </a:rPr>
-                        <a:t>corpus acessível</a:t>
+                        <a:t>-</a:t>
                       </a:r>
                     </a:p>
                   </a:txBody>
@@ -19631,29 +19103,7 @@
                           </a:solidFill>
                           <a:latin typeface="Calibri"/>
                         </a:rPr>
-                        <a:t>Não localizado no</a:t>
-                      </a:r>
-                    </a:p>
-                    <a:p>
-                      <a:pPr algn="ctr">
-                        <a:lnSpc>
-                          <a:spcPct val="100000"/>
-                        </a:lnSpc>
-                        <a:spcBef>
-                          <a:spcPts val="0"/>
-                        </a:spcBef>
-                        <a:spcAft>
-                          <a:spcPts val="0"/>
-                        </a:spcAft>
-                      </a:pPr>
-                      <a:r>
-                        <a:rPr sz="1300" b="0">
-                          <a:solidFill>
-                            <a:srgbClr val="1F1F1F"/>
-                          </a:solidFill>
-                          <a:latin typeface="Calibri"/>
-                        </a:rPr>
-                        <a:t>corpus acessível</a:t>
+                        <a:t>-</a:t>
                       </a:r>
                     </a:p>
                   </a:txBody>
@@ -19979,29 +19429,7 @@
                           </a:solidFill>
                           <a:latin typeface="Calibri"/>
                         </a:rPr>
-                        <a:t>mi; limites privados no</a:t>
-                      </a:r>
-                    </a:p>
-                    <a:p>
-                      <a:pPr algn="ctr">
-                        <a:lnSpc>
-                          <a:spcPct val="100000"/>
-                        </a:lnSpc>
-                        <a:spcBef>
-                          <a:spcPts val="0"/>
-                        </a:spcBef>
-                        <a:spcAft>
-                          <a:spcPts val="0"/>
-                        </a:spcAft>
-                      </a:pPr>
-                      <a:r>
-                        <a:rPr sz="1300" b="0">
-                          <a:solidFill>
-                            <a:srgbClr val="1F1F1F"/>
-                          </a:solidFill>
-                          <a:latin typeface="Calibri"/>
-                        </a:rPr>
-                        <a:t>contrato</a:t>
+                        <a:t>mi</a:t>
                       </a:r>
                     </a:p>
                   </a:txBody>
@@ -20050,29 +19478,7 @@
                           </a:solidFill>
                           <a:latin typeface="Calibri"/>
                         </a:rPr>
-                        <a:t>Não localizado no</a:t>
-                      </a:r>
-                    </a:p>
-                    <a:p>
-                      <a:pPr algn="ctr">
-                        <a:lnSpc>
-                          <a:spcPct val="100000"/>
-                        </a:lnSpc>
-                        <a:spcBef>
-                          <a:spcPts val="0"/>
-                        </a:spcBef>
-                        <a:spcAft>
-                          <a:spcPts val="0"/>
-                        </a:spcAft>
-                      </a:pPr>
-                      <a:r>
-                        <a:rPr sz="1300" b="0">
-                          <a:solidFill>
-                            <a:srgbClr val="1F1F1F"/>
-                          </a:solidFill>
-                          <a:latin typeface="Calibri"/>
-                        </a:rPr>
-                        <a:t>corpus acessível</a:t>
+                        <a:t>-</a:t>
                       </a:r>
                     </a:p>
                   </a:txBody>
@@ -20392,7 +19798,7 @@
                       <a:r>
                         <a:rPr sz="1300" b="1">
                           <a:solidFill>
-                            <a:srgbClr val="1F1F1F"/>
+                            <a:srgbClr val="FFFFFF"/>
                           </a:solidFill>
                           <a:latin typeface="Calibri"/>
                         </a:rPr>
@@ -20402,7 +19808,7 @@
                   </a:txBody>
                   <a:tcPr marL="91440" marR="91440" marT="41148" marB="41148" anchor="ctr">
                     <a:solidFill>
-                      <a:srgbClr val="EC7000"/>
+                      <a:srgbClr val="FF6200"/>
                     </a:solidFill>
                     <a:lnL>
                       <a:noFill/>
@@ -20441,7 +19847,7 @@
                       <a:r>
                         <a:rPr sz="1300" b="1">
                           <a:solidFill>
-                            <a:srgbClr val="1F1F1F"/>
+                            <a:srgbClr val="FFFFFF"/>
                           </a:solidFill>
                           <a:latin typeface="Calibri"/>
                         </a:rPr>
@@ -20451,7 +19857,7 @@
                   </a:txBody>
                   <a:tcPr marL="91440" marR="91440" marT="41148" marB="41148" anchor="ctr">
                     <a:solidFill>
-                      <a:srgbClr val="EC7000"/>
+                      <a:srgbClr val="FF6200"/>
                     </a:solidFill>
                     <a:lnL>
                       <a:noFill/>
@@ -20490,7 +19896,7 @@
                       <a:r>
                         <a:rPr sz="1300" b="1">
                           <a:solidFill>
-                            <a:srgbClr val="1F1F1F"/>
+                            <a:srgbClr val="FFFFFF"/>
                           </a:solidFill>
                           <a:latin typeface="Calibri"/>
                         </a:rPr>
@@ -20500,7 +19906,7 @@
                   </a:txBody>
                   <a:tcPr marL="91440" marR="91440" marT="41148" marB="41148" anchor="ctr">
                     <a:solidFill>
-                      <a:srgbClr val="EC7000"/>
+                      <a:srgbClr val="FF6200"/>
                     </a:solidFill>
                     <a:lnL>
                       <a:noFill/>
@@ -20592,7 +19998,7 @@
                           </a:solidFill>
                           <a:latin typeface="Calibri"/>
                         </a:rPr>
-                        <a:t>Não localizado no corpus acessível</a:t>
+                        <a:t>-</a:t>
                       </a:r>
                     </a:p>
                   </a:txBody>
@@ -20639,7 +20045,7 @@
                           </a:solidFill>
                           <a:latin typeface="Calibri"/>
                         </a:rPr>
-                        <a:t>Não localizado no corpus acessível</a:t>
+                        <a:t>-</a:t>
                       </a:r>
                     </a:p>
                   </a:txBody>
@@ -20735,7 +20141,7 @@
                           </a:solidFill>
                           <a:latin typeface="Calibri"/>
                         </a:rPr>
-                        <a:t>Não localizado no corpus acessível</a:t>
+                        <a:t>-</a:t>
                       </a:r>
                     </a:p>
                   </a:txBody>
@@ -20782,7 +20188,7 @@
                           </a:solidFill>
                           <a:latin typeface="Calibri"/>
                         </a:rPr>
-                        <a:t>Não localizado no corpus acessível</a:t>
+                        <a:t>-</a:t>
                       </a:r>
                     </a:p>
                   </a:txBody>
@@ -20878,7 +20284,7 @@
                           </a:solidFill>
                           <a:latin typeface="Calibri"/>
                         </a:rPr>
-                        <a:t>Não localizado no corpus acessível</a:t>
+                        <a:t>-</a:t>
                       </a:r>
                     </a:p>
                   </a:txBody>
@@ -20925,7 +20331,7 @@
                           </a:solidFill>
                           <a:latin typeface="Calibri"/>
                         </a:rPr>
-                        <a:t>Não localizado no corpus acessível</a:t>
+                        <a:t>-</a:t>
                       </a:r>
                     </a:p>
                   </a:txBody>
@@ -21021,7 +20427,7 @@
                           </a:solidFill>
                           <a:latin typeface="Calibri"/>
                         </a:rPr>
-                        <a:t>Não localizado no corpus acessível</a:t>
+                        <a:t>-</a:t>
                       </a:r>
                     </a:p>
                   </a:txBody>
@@ -21068,7 +20474,7 @@
                           </a:solidFill>
                           <a:latin typeface="Calibri"/>
                         </a:rPr>
-                        <a:t>Não localizado no corpus acessível</a:t>
+                        <a:t>-</a:t>
                       </a:r>
                     </a:p>
                   </a:txBody>
@@ -21164,7 +20570,7 @@
                           </a:solidFill>
                           <a:latin typeface="Calibri"/>
                         </a:rPr>
-                        <a:t>Não localizado no corpus acessível</a:t>
+                        <a:t>-</a:t>
                       </a:r>
                     </a:p>
                   </a:txBody>
@@ -21211,7 +20617,7 @@
                           </a:solidFill>
                           <a:latin typeface="Calibri"/>
                         </a:rPr>
-                        <a:t>Não localizado no corpus acessível</a:t>
+                        <a:t>-</a:t>
                       </a:r>
                     </a:p>
                   </a:txBody>
@@ -21309,7 +20715,7 @@
                           </a:solidFill>
                           <a:latin typeface="Calibri"/>
                         </a:rPr>
-                        <a:t>Não localizado no corpus acessível</a:t>
+                        <a:t>-</a:t>
                       </a:r>
                     </a:p>
                   </a:txBody>
@@ -21358,7 +20764,7 @@
                           </a:solidFill>
                           <a:latin typeface="Calibri"/>
                         </a:rPr>
-                        <a:t>Não localizado no corpus acessível</a:t>
+                        <a:t>-</a:t>
                       </a:r>
                     </a:p>
                   </a:txBody>
@@ -21528,7 +20934,7 @@
         </p:nvGraphicFramePr>
         <p:xfrm>
           <a:off x="438912" y="932688"/>
-          <a:ext cx="11313868" cy="4700012"/>
+          <a:ext cx="11313868" cy="4137657"/>
         </p:xfrm>
         <a:graphic>
           <a:graphicData uri="http://schemas.openxmlformats.org/drawingml/2006/table">
@@ -21565,7 +20971,7 @@
                       <a:r>
                         <a:rPr sz="1300" b="1">
                           <a:solidFill>
-                            <a:srgbClr val="1F1F1F"/>
+                            <a:srgbClr val="FFFFFF"/>
                           </a:solidFill>
                           <a:latin typeface="Calibri"/>
                         </a:rPr>
@@ -21575,7 +20981,7 @@
                   </a:txBody>
                   <a:tcPr marL="91440" marR="91440" marT="41148" marB="41148" anchor="ctr">
                     <a:solidFill>
-                      <a:srgbClr val="EC7000"/>
+                      <a:srgbClr val="FF6200"/>
                     </a:solidFill>
                     <a:lnL>
                       <a:noFill/>
@@ -21614,7 +21020,7 @@
                       <a:r>
                         <a:rPr sz="1300" b="1">
                           <a:solidFill>
-                            <a:srgbClr val="1F1F1F"/>
+                            <a:srgbClr val="FFFFFF"/>
                           </a:solidFill>
                           <a:latin typeface="Calibri"/>
                         </a:rPr>
@@ -21624,7 +21030,7 @@
                   </a:txBody>
                   <a:tcPr marL="91440" marR="91440" marT="41148" marB="41148" anchor="ctr">
                     <a:solidFill>
-                      <a:srgbClr val="EC7000"/>
+                      <a:srgbClr val="FF6200"/>
                     </a:solidFill>
                     <a:lnL>
                       <a:noFill/>
@@ -21663,7 +21069,7 @@
                       <a:r>
                         <a:rPr sz="1300" b="1">
                           <a:solidFill>
-                            <a:srgbClr val="1F1F1F"/>
+                            <a:srgbClr val="FFFFFF"/>
                           </a:solidFill>
                           <a:latin typeface="Calibri"/>
                         </a:rPr>
@@ -21673,7 +21079,7 @@
                   </a:txBody>
                   <a:tcPr marL="91440" marR="91440" marT="41148" marB="41148" anchor="ctr">
                     <a:solidFill>
-                      <a:srgbClr val="EC7000"/>
+                      <a:srgbClr val="FF6200"/>
                     </a:solidFill>
                     <a:lnL>
                       <a:noFill/>
@@ -21712,7 +21118,7 @@
                       <a:r>
                         <a:rPr sz="1300" b="1">
                           <a:solidFill>
-                            <a:srgbClr val="1F1F1F"/>
+                            <a:srgbClr val="FFFFFF"/>
                           </a:solidFill>
                           <a:latin typeface="Calibri"/>
                         </a:rPr>
@@ -21734,7 +21140,7 @@
                       <a:r>
                         <a:rPr sz="1300" b="1">
                           <a:solidFill>
-                            <a:srgbClr val="1F1F1F"/>
+                            <a:srgbClr val="FFFFFF"/>
                           </a:solidFill>
                           <a:latin typeface="Calibri"/>
                         </a:rPr>
@@ -21744,7 +21150,7 @@
                   </a:txBody>
                   <a:tcPr marL="91440" marR="91440" marT="41148" marB="41148" anchor="ctr">
                     <a:solidFill>
-                      <a:srgbClr val="EC7000"/>
+                      <a:srgbClr val="FF6200"/>
                     </a:solidFill>
                     <a:lnL>
                       <a:noFill/>
@@ -21783,7 +21189,7 @@
                       <a:r>
                         <a:rPr sz="1300" b="1">
                           <a:solidFill>
-                            <a:srgbClr val="1F1F1F"/>
+                            <a:srgbClr val="FFFFFF"/>
                           </a:solidFill>
                           <a:latin typeface="Calibri"/>
                         </a:rPr>
@@ -21805,7 +21211,7 @@
                       <a:r>
                         <a:rPr sz="1300" b="1">
                           <a:solidFill>
-                            <a:srgbClr val="1F1F1F"/>
+                            <a:srgbClr val="FFFFFF"/>
                           </a:solidFill>
                           <a:latin typeface="Calibri"/>
                         </a:rPr>
@@ -21815,7 +21221,7 @@
                   </a:txBody>
                   <a:tcPr marL="91440" marR="91440" marT="41148" marB="41148" anchor="ctr">
                     <a:solidFill>
-                      <a:srgbClr val="EC7000"/>
+                      <a:srgbClr val="FF6200"/>
                     </a:solidFill>
                     <a:lnL>
                       <a:noFill/>
@@ -22067,29 +21473,7 @@
                           </a:solidFill>
                           <a:latin typeface="Calibri"/>
                         </a:rPr>
-                        <a:t>Não localizado no</a:t>
-                      </a:r>
-                    </a:p>
-                    <a:p>
-                      <a:pPr algn="ctr">
-                        <a:lnSpc>
-                          <a:spcPct val="100000"/>
-                        </a:lnSpc>
-                        <a:spcBef>
-                          <a:spcPts val="0"/>
-                        </a:spcBef>
-                        <a:spcAft>
-                          <a:spcPts val="0"/>
-                        </a:spcAft>
-                      </a:pPr>
-                      <a:r>
-                        <a:rPr sz="1300" b="0">
-                          <a:solidFill>
-                            <a:srgbClr val="1F1F1F"/>
-                          </a:solidFill>
-                          <a:latin typeface="Calibri"/>
-                        </a:rPr>
-                        <a:t>corpus acessível</a:t>
+                        <a:t>-</a:t>
                       </a:r>
                     </a:p>
                   </a:txBody>
@@ -22590,29 +21974,7 @@
                           </a:solidFill>
                           <a:latin typeface="Calibri"/>
                         </a:rPr>
-                        <a:t>Não localizado no</a:t>
-                      </a:r>
-                    </a:p>
-                    <a:p>
-                      <a:pPr algn="ctr">
-                        <a:lnSpc>
-                          <a:spcPct val="100000"/>
-                        </a:lnSpc>
-                        <a:spcBef>
-                          <a:spcPts val="0"/>
-                        </a:spcBef>
-                        <a:spcAft>
-                          <a:spcPts val="0"/>
-                        </a:spcAft>
-                      </a:pPr>
-                      <a:r>
-                        <a:rPr sz="1300" b="0">
-                          <a:solidFill>
-                            <a:srgbClr val="1F1F1F"/>
-                          </a:solidFill>
-                          <a:latin typeface="Calibri"/>
-                        </a:rPr>
-                        <a:t>corpus acessível</a:t>
+                        <a:t>-</a:t>
                       </a:r>
                     </a:p>
                   </a:txBody>
@@ -22659,29 +22021,7 @@
                           </a:solidFill>
                           <a:latin typeface="Calibri"/>
                         </a:rPr>
-                        <a:t>Não localizado no</a:t>
-                      </a:r>
-                    </a:p>
-                    <a:p>
-                      <a:pPr algn="ctr">
-                        <a:lnSpc>
-                          <a:spcPct val="100000"/>
-                        </a:lnSpc>
-                        <a:spcBef>
-                          <a:spcPts val="0"/>
-                        </a:spcBef>
-                        <a:spcAft>
-                          <a:spcPts val="0"/>
-                        </a:spcAft>
-                      </a:pPr>
-                      <a:r>
-                        <a:rPr sz="1300" b="0">
-                          <a:solidFill>
-                            <a:srgbClr val="1F1F1F"/>
-                          </a:solidFill>
-                          <a:latin typeface="Calibri"/>
-                        </a:rPr>
-                        <a:t>corpus acessível</a:t>
+                        <a:t>-</a:t>
                       </a:r>
                     </a:p>
                   </a:txBody>
@@ -22704,7 +22044,7 @@
                   </a:tcPr>
                 </a:tc>
               </a:tr>
-              <a:tr h="470916">
+              <a:tr h="283464">
                 <a:tc>
                   <a:txBody>
                     <a:bodyPr wrap="square">
@@ -22777,29 +22117,7 @@
                           </a:solidFill>
                           <a:latin typeface="Calibri"/>
                         </a:rPr>
-                        <a:t>Não localizado no</a:t>
-                      </a:r>
-                    </a:p>
-                    <a:p>
-                      <a:pPr algn="ctr">
-                        <a:lnSpc>
-                          <a:spcPct val="100000"/>
-                        </a:lnSpc>
-                        <a:spcBef>
-                          <a:spcPts val="0"/>
-                        </a:spcBef>
-                        <a:spcAft>
-                          <a:spcPts val="0"/>
-                        </a:spcAft>
-                      </a:pPr>
-                      <a:r>
-                        <a:rPr sz="1300" b="0">
-                          <a:solidFill>
-                            <a:srgbClr val="1F1F1F"/>
-                          </a:solidFill>
-                          <a:latin typeface="Calibri"/>
-                        </a:rPr>
-                        <a:t>corpus acessível</a:t>
+                        <a:t>-</a:t>
                       </a:r>
                     </a:p>
                   </a:txBody>
@@ -22846,29 +22164,7 @@
                           </a:solidFill>
                           <a:latin typeface="Calibri"/>
                         </a:rPr>
-                        <a:t>Não localizado no</a:t>
-                      </a:r>
-                    </a:p>
-                    <a:p>
-                      <a:pPr algn="ctr">
-                        <a:lnSpc>
-                          <a:spcPct val="100000"/>
-                        </a:lnSpc>
-                        <a:spcBef>
-                          <a:spcPts val="0"/>
-                        </a:spcBef>
-                        <a:spcAft>
-                          <a:spcPts val="0"/>
-                        </a:spcAft>
-                      </a:pPr>
-                      <a:r>
-                        <a:rPr sz="1300" b="0">
-                          <a:solidFill>
-                            <a:srgbClr val="1F1F1F"/>
-                          </a:solidFill>
-                          <a:latin typeface="Calibri"/>
-                        </a:rPr>
-                        <a:t>corpus acessível</a:t>
+                        <a:t>-</a:t>
                       </a:r>
                     </a:p>
                   </a:txBody>
@@ -22915,29 +22211,7 @@
                           </a:solidFill>
                           <a:latin typeface="Calibri"/>
                         </a:rPr>
-                        <a:t>Não localizado no</a:t>
-                      </a:r>
-                    </a:p>
-                    <a:p>
-                      <a:pPr algn="ctr">
-                        <a:lnSpc>
-                          <a:spcPct val="100000"/>
-                        </a:lnSpc>
-                        <a:spcBef>
-                          <a:spcPts val="0"/>
-                        </a:spcBef>
-                        <a:spcAft>
-                          <a:spcPts val="0"/>
-                        </a:spcAft>
-                      </a:pPr>
-                      <a:r>
-                        <a:rPr sz="1300" b="0">
-                          <a:solidFill>
-                            <a:srgbClr val="1F1F1F"/>
-                          </a:solidFill>
-                          <a:latin typeface="Calibri"/>
-                        </a:rPr>
-                        <a:t>corpus acessível</a:t>
+                        <a:t>-</a:t>
                       </a:r>
                     </a:p>
                   </a:txBody>
@@ -22984,29 +22258,7 @@
                           </a:solidFill>
                           <a:latin typeface="Calibri"/>
                         </a:rPr>
-                        <a:t>Não localizado no</a:t>
-                      </a:r>
-                    </a:p>
-                    <a:p>
-                      <a:pPr algn="ctr">
-                        <a:lnSpc>
-                          <a:spcPct val="100000"/>
-                        </a:lnSpc>
-                        <a:spcBef>
-                          <a:spcPts val="0"/>
-                        </a:spcBef>
-                        <a:spcAft>
-                          <a:spcPts val="0"/>
-                        </a:spcAft>
-                      </a:pPr>
-                      <a:r>
-                        <a:rPr sz="1300" b="0">
-                          <a:solidFill>
-                            <a:srgbClr val="1F1F1F"/>
-                          </a:solidFill>
-                          <a:latin typeface="Calibri"/>
-                        </a:rPr>
-                        <a:t>corpus acessível</a:t>
+                        <a:t>-</a:t>
                       </a:r>
                     </a:p>
                   </a:txBody>
@@ -23306,29 +22558,7 @@
                           </a:solidFill>
                           <a:latin typeface="Calibri"/>
                         </a:rPr>
-                        <a:t>Não localizado no</a:t>
-                      </a:r>
-                    </a:p>
-                    <a:p>
-                      <a:pPr algn="ctr">
-                        <a:lnSpc>
-                          <a:spcPct val="100000"/>
-                        </a:lnSpc>
-                        <a:spcBef>
-                          <a:spcPts val="0"/>
-                        </a:spcBef>
-                        <a:spcAft>
-                          <a:spcPts val="0"/>
-                        </a:spcAft>
-                      </a:pPr>
-                      <a:r>
-                        <a:rPr sz="1300" b="0">
-                          <a:solidFill>
-                            <a:srgbClr val="1F1F1F"/>
-                          </a:solidFill>
-                          <a:latin typeface="Calibri"/>
-                        </a:rPr>
-                        <a:t>corpus acessível</a:t>
+                        <a:t>-</a:t>
                       </a:r>
                     </a:p>
                   </a:txBody>
@@ -23442,7 +22672,7 @@
                   </a:tcPr>
                 </a:tc>
               </a:tr>
-              <a:tr h="1033271">
+              <a:tr h="658368">
                 <a:tc>
                   <a:txBody>
                     <a:bodyPr wrap="square">
@@ -23561,51 +22791,7 @@
                           </a:solidFill>
                           <a:latin typeface="Calibri"/>
                         </a:rPr>
-                        <a:t>manuais; piso de</a:t>
-                      </a:r>
-                    </a:p>
-                    <a:p>
-                      <a:pPr algn="ctr">
-                        <a:lnSpc>
-                          <a:spcPct val="100000"/>
-                        </a:lnSpc>
-                        <a:spcBef>
-                          <a:spcPts val="0"/>
-                        </a:spcBef>
-                        <a:spcAft>
-                          <a:spcPts val="0"/>
-                        </a:spcAft>
-                      </a:pPr>
-                      <a:r>
-                        <a:rPr sz="1300" b="0">
-                          <a:solidFill>
-                            <a:srgbClr val="1F1F1F"/>
-                          </a:solidFill>
-                          <a:latin typeface="Calibri"/>
-                        </a:rPr>
-                        <a:t>cobertura não</a:t>
-                      </a:r>
-                    </a:p>
-                    <a:p>
-                      <a:pPr algn="ctr">
-                        <a:lnSpc>
-                          <a:spcPct val="100000"/>
-                        </a:lnSpc>
-                        <a:spcBef>
-                          <a:spcPts val="0"/>
-                        </a:spcBef>
-                        <a:spcAft>
-                          <a:spcPts val="0"/>
-                        </a:spcAft>
-                      </a:pPr>
-                      <a:r>
-                        <a:rPr sz="1300" b="0">
-                          <a:solidFill>
-                            <a:srgbClr val="1F1F1F"/>
-                          </a:solidFill>
-                          <a:latin typeface="Calibri"/>
-                        </a:rPr>
-                        <a:t>localizado</a:t>
+                        <a:t>manuais</a:t>
                       </a:r>
                     </a:p>
                   </a:txBody>
@@ -23654,29 +22840,7 @@
                           </a:solidFill>
                           <a:latin typeface="Calibri"/>
                         </a:rPr>
-                        <a:t>Não localizado no</a:t>
-                      </a:r>
-                    </a:p>
-                    <a:p>
-                      <a:pPr algn="ctr">
-                        <a:lnSpc>
-                          <a:spcPct val="100000"/>
-                        </a:lnSpc>
-                        <a:spcBef>
-                          <a:spcPts val="0"/>
-                        </a:spcBef>
-                        <a:spcAft>
-                          <a:spcPts val="0"/>
-                        </a:spcAft>
-                      </a:pPr>
-                      <a:r>
-                        <a:rPr sz="1300" b="0">
-                          <a:solidFill>
-                            <a:srgbClr val="1F1F1F"/>
-                          </a:solidFill>
-                          <a:latin typeface="Calibri"/>
-                        </a:rPr>
-                        <a:t>corpus acessível</a:t>
+                        <a:t>-</a:t>
                       </a:r>
                     </a:p>
                   </a:txBody>
@@ -23725,29 +22889,7 @@
                           </a:solidFill>
                           <a:latin typeface="Calibri"/>
                         </a:rPr>
-                        <a:t>Não localizado no</a:t>
-                      </a:r>
-                    </a:p>
-                    <a:p>
-                      <a:pPr algn="ctr">
-                        <a:lnSpc>
-                          <a:spcPct val="100000"/>
-                        </a:lnSpc>
-                        <a:spcBef>
-                          <a:spcPts val="0"/>
-                        </a:spcBef>
-                        <a:spcAft>
-                          <a:spcPts val="0"/>
-                        </a:spcAft>
-                      </a:pPr>
-                      <a:r>
-                        <a:rPr sz="1300" b="0">
-                          <a:solidFill>
-                            <a:srgbClr val="1F1F1F"/>
-                          </a:solidFill>
-                          <a:latin typeface="Calibri"/>
-                        </a:rPr>
-                        <a:t>corpus acessível</a:t>
+                        <a:t>-</a:t>
                       </a:r>
                     </a:p>
                   </a:txBody>
@@ -23796,29 +22938,7 @@
                           </a:solidFill>
                           <a:latin typeface="Calibri"/>
                         </a:rPr>
-                        <a:t>Não localizado no</a:t>
-                      </a:r>
-                    </a:p>
-                    <a:p>
-                      <a:pPr algn="ctr">
-                        <a:lnSpc>
-                          <a:spcPct val="100000"/>
-                        </a:lnSpc>
-                        <a:spcBef>
-                          <a:spcPts val="0"/>
-                        </a:spcBef>
-                        <a:spcAft>
-                          <a:spcPts val="0"/>
-                        </a:spcAft>
-                      </a:pPr>
-                      <a:r>
-                        <a:rPr sz="1300" b="0">
-                          <a:solidFill>
-                            <a:srgbClr val="1F1F1F"/>
-                          </a:solidFill>
-                          <a:latin typeface="Calibri"/>
-                        </a:rPr>
-                        <a:t>corpus acessível</a:t>
+                        <a:t>-</a:t>
                       </a:r>
                     </a:p>
                   </a:txBody>
@@ -24023,7 +23143,7 @@
                       <a:r>
                         <a:rPr sz="1300" b="1">
                           <a:solidFill>
-                            <a:srgbClr val="1F1F1F"/>
+                            <a:srgbClr val="FFFFFF"/>
                           </a:solidFill>
                           <a:latin typeface="Calibri"/>
                         </a:rPr>
@@ -24033,7 +23153,7 @@
                   </a:txBody>
                   <a:tcPr marL="91440" marR="91440" marT="41148" marB="41148" anchor="ctr">
                     <a:solidFill>
-                      <a:srgbClr val="EC7000"/>
+                      <a:srgbClr val="FF6200"/>
                     </a:solidFill>
                     <a:lnL>
                       <a:noFill/>
@@ -24072,7 +23192,7 @@
                       <a:r>
                         <a:rPr sz="1300" b="1">
                           <a:solidFill>
-                            <a:srgbClr val="1F1F1F"/>
+                            <a:srgbClr val="FFFFFF"/>
                           </a:solidFill>
                           <a:latin typeface="Calibri"/>
                         </a:rPr>
@@ -24082,7 +23202,7 @@
                   </a:txBody>
                   <a:tcPr marL="91440" marR="91440" marT="41148" marB="41148" anchor="ctr">
                     <a:solidFill>
-                      <a:srgbClr val="EC7000"/>
+                      <a:srgbClr val="FF6200"/>
                     </a:solidFill>
                     <a:lnL>
                       <a:noFill/>
@@ -24121,7 +23241,7 @@
                       <a:r>
                         <a:rPr sz="1300" b="1">
                           <a:solidFill>
-                            <a:srgbClr val="1F1F1F"/>
+                            <a:srgbClr val="FFFFFF"/>
                           </a:solidFill>
                           <a:latin typeface="Calibri"/>
                         </a:rPr>
@@ -24131,7 +23251,7 @@
                   </a:txBody>
                   <a:tcPr marL="91440" marR="91440" marT="41148" marB="41148" anchor="ctr">
                     <a:solidFill>
-                      <a:srgbClr val="EC7000"/>
+                      <a:srgbClr val="FF6200"/>
                     </a:solidFill>
                     <a:lnL>
                       <a:noFill/>
@@ -24292,7 +23412,7 @@
                           </a:solidFill>
                           <a:latin typeface="Calibri"/>
                         </a:rPr>
-                        <a:t>Não localizado no corpus acessível</a:t>
+                        <a:t>-</a:t>
                       </a:r>
                     </a:p>
                   </a:txBody>
@@ -24410,7 +23530,7 @@
                           </a:solidFill>
                           <a:latin typeface="Calibri"/>
                         </a:rPr>
-                        <a:t>Não localizado no corpus acessível</a:t>
+                        <a:t>-</a:t>
                       </a:r>
                     </a:p>
                   </a:txBody>
@@ -24457,7 +23577,7 @@
                           </a:solidFill>
                           <a:latin typeface="Calibri"/>
                         </a:rPr>
-                        <a:t>Não localizado no corpus acessível</a:t>
+                        <a:t>-</a:t>
                       </a:r>
                     </a:p>
                   </a:txBody>
@@ -24553,7 +23673,7 @@
                           </a:solidFill>
                           <a:latin typeface="Calibri"/>
                         </a:rPr>
-                        <a:t>Não localizado no corpus acessível</a:t>
+                        <a:t>-</a:t>
                       </a:r>
                     </a:p>
                   </a:txBody>
@@ -24600,7 +23720,7 @@
                           </a:solidFill>
                           <a:latin typeface="Calibri"/>
                         </a:rPr>
-                        <a:t>Não localizado no corpus acessível</a:t>
+                        <a:t>-</a:t>
                       </a:r>
                     </a:p>
                   </a:txBody>
@@ -24696,7 +23816,7 @@
                           </a:solidFill>
                           <a:latin typeface="Calibri"/>
                         </a:rPr>
-                        <a:t>Não localizado no corpus acessível</a:t>
+                        <a:t>-</a:t>
                       </a:r>
                     </a:p>
                   </a:txBody>
@@ -24743,7 +23863,7 @@
                           </a:solidFill>
                           <a:latin typeface="Calibri"/>
                         </a:rPr>
-                        <a:t>Não localizado no corpus acessível</a:t>
+                        <a:t>-</a:t>
                       </a:r>
                     </a:p>
                   </a:txBody>
@@ -24841,7 +23961,7 @@
                           </a:solidFill>
                           <a:latin typeface="Calibri"/>
                         </a:rPr>
-                        <a:t>Não localizado no corpus acessível</a:t>
+                        <a:t>-</a:t>
                       </a:r>
                     </a:p>
                   </a:txBody>
@@ -24890,7 +24010,7 @@
                           </a:solidFill>
                           <a:latin typeface="Calibri"/>
                         </a:rPr>
-                        <a:t>Não localizado no corpus acessível</a:t>
+                        <a:t>-</a:t>
                       </a:r>
                     </a:p>
                   </a:txBody>
@@ -25060,7 +24180,7 @@
         </p:nvGraphicFramePr>
         <p:xfrm>
           <a:off x="438912" y="932688"/>
-          <a:ext cx="11313868" cy="3195825"/>
+          <a:ext cx="11313868" cy="3008374"/>
         </p:xfrm>
         <a:graphic>
           <a:graphicData uri="http://schemas.openxmlformats.org/drawingml/2006/table">
@@ -25097,7 +24217,7 @@
                       <a:r>
                         <a:rPr sz="1300" b="1">
                           <a:solidFill>
-                            <a:srgbClr val="1F1F1F"/>
+                            <a:srgbClr val="FFFFFF"/>
                           </a:solidFill>
                           <a:latin typeface="Calibri"/>
                         </a:rPr>
@@ -25107,7 +24227,7 @@
                   </a:txBody>
                   <a:tcPr marL="91440" marR="91440" marT="41148" marB="41148" anchor="ctr">
                     <a:solidFill>
-                      <a:srgbClr val="EC7000"/>
+                      <a:srgbClr val="FF6200"/>
                     </a:solidFill>
                     <a:lnL>
                       <a:noFill/>
@@ -25146,7 +24266,7 @@
                       <a:r>
                         <a:rPr sz="1300" b="1">
                           <a:solidFill>
-                            <a:srgbClr val="1F1F1F"/>
+                            <a:srgbClr val="FFFFFF"/>
                           </a:solidFill>
                           <a:latin typeface="Calibri"/>
                         </a:rPr>
@@ -25156,7 +24276,7 @@
                   </a:txBody>
                   <a:tcPr marL="91440" marR="91440" marT="41148" marB="41148" anchor="ctr">
                     <a:solidFill>
-                      <a:srgbClr val="EC7000"/>
+                      <a:srgbClr val="FF6200"/>
                     </a:solidFill>
                     <a:lnL>
                       <a:noFill/>
@@ -25195,7 +24315,7 @@
                       <a:r>
                         <a:rPr sz="1300" b="1">
                           <a:solidFill>
-                            <a:srgbClr val="1F1F1F"/>
+                            <a:srgbClr val="FFFFFF"/>
                           </a:solidFill>
                           <a:latin typeface="Calibri"/>
                         </a:rPr>
@@ -25205,7 +24325,7 @@
                   </a:txBody>
                   <a:tcPr marL="91440" marR="91440" marT="41148" marB="41148" anchor="ctr">
                     <a:solidFill>
-                      <a:srgbClr val="EC7000"/>
+                      <a:srgbClr val="FF6200"/>
                     </a:solidFill>
                     <a:lnL>
                       <a:noFill/>
@@ -25244,7 +24364,7 @@
                       <a:r>
                         <a:rPr sz="1300" b="1">
                           <a:solidFill>
-                            <a:srgbClr val="1F1F1F"/>
+                            <a:srgbClr val="FFFFFF"/>
                           </a:solidFill>
                           <a:latin typeface="Calibri"/>
                         </a:rPr>
@@ -25266,7 +24386,7 @@
                       <a:r>
                         <a:rPr sz="1300" b="1">
                           <a:solidFill>
-                            <a:srgbClr val="1F1F1F"/>
+                            <a:srgbClr val="FFFFFF"/>
                           </a:solidFill>
                           <a:latin typeface="Calibri"/>
                         </a:rPr>
@@ -25276,7 +24396,7 @@
                   </a:txBody>
                   <a:tcPr marL="91440" marR="91440" marT="41148" marB="41148" anchor="ctr">
                     <a:solidFill>
-                      <a:srgbClr val="EC7000"/>
+                      <a:srgbClr val="FF6200"/>
                     </a:solidFill>
                     <a:lnL>
                       <a:noFill/>
@@ -25315,7 +24435,7 @@
                       <a:r>
                         <a:rPr sz="1300" b="1">
                           <a:solidFill>
-                            <a:srgbClr val="1F1F1F"/>
+                            <a:srgbClr val="FFFFFF"/>
                           </a:solidFill>
                           <a:latin typeface="Calibri"/>
                         </a:rPr>
@@ -25337,7 +24457,7 @@
                       <a:r>
                         <a:rPr sz="1300" b="1">
                           <a:solidFill>
-                            <a:srgbClr val="1F1F1F"/>
+                            <a:srgbClr val="FFFFFF"/>
                           </a:solidFill>
                           <a:latin typeface="Calibri"/>
                         </a:rPr>
@@ -25347,7 +24467,7 @@
                   </a:txBody>
                   <a:tcPr marL="91440" marR="91440" marT="41148" marB="41148" anchor="ctr">
                     <a:solidFill>
-                      <a:srgbClr val="EC7000"/>
+                      <a:srgbClr val="FF6200"/>
                     </a:solidFill>
                     <a:lnL>
                       <a:noFill/>
@@ -25366,7 +24486,7 @@
                   </a:tcPr>
                 </a:tc>
               </a:tr>
-              <a:tr h="845819">
+              <a:tr h="658368">
                 <a:tc>
                   <a:txBody>
                     <a:bodyPr wrap="square">
@@ -25621,29 +24741,7 @@
                           </a:solidFill>
                           <a:latin typeface="Calibri"/>
                         </a:rPr>
-                        <a:t>Não localizado no</a:t>
-                      </a:r>
-                    </a:p>
-                    <a:p>
-                      <a:pPr algn="ctr">
-                        <a:lnSpc>
-                          <a:spcPct val="100000"/>
-                        </a:lnSpc>
-                        <a:spcBef>
-                          <a:spcPts val="0"/>
-                        </a:spcBef>
-                        <a:spcAft>
-                          <a:spcPts val="0"/>
-                        </a:spcAft>
-                      </a:pPr>
-                      <a:r>
-                        <a:rPr sz="1300" b="0">
-                          <a:solidFill>
-                            <a:srgbClr val="1F1F1F"/>
-                          </a:solidFill>
-                          <a:latin typeface="Calibri"/>
-                        </a:rPr>
-                        <a:t>corpus acessível</a:t>
+                        <a:t>-</a:t>
                       </a:r>
                     </a:p>
                   </a:txBody>
@@ -25712,51 +24810,7 @@
                           </a:solidFill>
                           <a:latin typeface="Calibri"/>
                         </a:rPr>
-                        <a:t>da classe investida;</a:t>
-                      </a:r>
-                    </a:p>
-                    <a:p>
-                      <a:pPr algn="ctr">
-                        <a:lnSpc>
-                          <a:spcPct val="100000"/>
-                        </a:lnSpc>
-                        <a:spcBef>
-                          <a:spcPts val="0"/>
-                        </a:spcBef>
-                        <a:spcAft>
-                          <a:spcPts val="0"/>
-                        </a:spcAft>
-                      </a:pPr>
-                      <a:r>
-                        <a:rPr sz="1300" b="0">
-                          <a:solidFill>
-                            <a:srgbClr val="1F1F1F"/>
-                          </a:solidFill>
-                          <a:latin typeface="Calibri"/>
-                        </a:rPr>
-                        <a:t>percentual específico</a:t>
-                      </a:r>
-                    </a:p>
-                    <a:p>
-                      <a:pPr algn="ctr">
-                        <a:lnSpc>
-                          <a:spcPct val="100000"/>
-                        </a:lnSpc>
-                        <a:spcBef>
-                          <a:spcPts val="0"/>
-                        </a:spcBef>
-                        <a:spcAft>
-                          <a:spcPts val="0"/>
-                        </a:spcAft>
-                      </a:pPr>
-                      <a:r>
-                        <a:rPr sz="1300" b="0">
-                          <a:solidFill>
-                            <a:srgbClr val="1F1F1F"/>
-                          </a:solidFill>
-                          <a:latin typeface="Calibri"/>
-                        </a:rPr>
-                        <a:t>não localizado</a:t>
+                        <a:t>da classe investida</a:t>
                       </a:r>
                     </a:p>
                   </a:txBody>
@@ -26056,29 +25110,7 @@
                           </a:solidFill>
                           <a:latin typeface="Calibri"/>
                         </a:rPr>
-                        <a:t>Não localizado no</a:t>
-                      </a:r>
-                    </a:p>
-                    <a:p>
-                      <a:pPr algn="ctr">
-                        <a:lnSpc>
-                          <a:spcPct val="100000"/>
-                        </a:lnSpc>
-                        <a:spcBef>
-                          <a:spcPts val="0"/>
-                        </a:spcBef>
-                        <a:spcAft>
-                          <a:spcPts val="0"/>
-                        </a:spcAft>
-                      </a:pPr>
-                      <a:r>
-                        <a:rPr sz="1300" b="0">
-                          <a:solidFill>
-                            <a:srgbClr val="1F1F1F"/>
-                          </a:solidFill>
-                          <a:latin typeface="Calibri"/>
-                        </a:rPr>
-                        <a:t>corpus acessível</a:t>
+                        <a:t>-</a:t>
                       </a:r>
                     </a:p>
                   </a:txBody>
@@ -26125,29 +25157,7 @@
                           </a:solidFill>
                           <a:latin typeface="Calibri"/>
                         </a:rPr>
-                        <a:t>Não localizado no</a:t>
-                      </a:r>
-                    </a:p>
-                    <a:p>
-                      <a:pPr algn="ctr">
-                        <a:lnSpc>
-                          <a:spcPct val="100000"/>
-                        </a:lnSpc>
-                        <a:spcBef>
-                          <a:spcPts val="0"/>
-                        </a:spcBef>
-                        <a:spcAft>
-                          <a:spcPts val="0"/>
-                        </a:spcAft>
-                      </a:pPr>
-                      <a:r>
-                        <a:rPr sz="1300" b="0">
-                          <a:solidFill>
-                            <a:srgbClr val="1F1F1F"/>
-                          </a:solidFill>
-                          <a:latin typeface="Calibri"/>
-                        </a:rPr>
-                        <a:t>corpus acessível</a:t>
+                        <a:t>-</a:t>
                       </a:r>
                     </a:p>
                   </a:txBody>
@@ -26497,29 +25507,7 @@
                           </a:solidFill>
                           <a:latin typeface="Calibri"/>
                         </a:rPr>
-                        <a:t>Não localizado no</a:t>
-                      </a:r>
-                    </a:p>
-                    <a:p>
-                      <a:pPr algn="ctr">
-                        <a:lnSpc>
-                          <a:spcPct val="100000"/>
-                        </a:lnSpc>
-                        <a:spcBef>
-                          <a:spcPts val="0"/>
-                        </a:spcBef>
-                        <a:spcAft>
-                          <a:spcPts val="0"/>
-                        </a:spcAft>
-                      </a:pPr>
-                      <a:r>
-                        <a:rPr sz="1300" b="0">
-                          <a:solidFill>
-                            <a:srgbClr val="1F1F1F"/>
-                          </a:solidFill>
-                          <a:latin typeface="Calibri"/>
-                        </a:rPr>
-                        <a:t>corpus acessível</a:t>
+                        <a:t>-</a:t>
                       </a:r>
                     </a:p>
                   </a:txBody>
@@ -26819,7 +25807,7 @@
                       <a:r>
                         <a:rPr sz="1300" b="1">
                           <a:solidFill>
-                            <a:srgbClr val="1F1F1F"/>
+                            <a:srgbClr val="FFFFFF"/>
                           </a:solidFill>
                           <a:latin typeface="Calibri"/>
                         </a:rPr>
@@ -26829,7 +25817,7 @@
                   </a:txBody>
                   <a:tcPr marL="91440" marR="91440" marT="41148" marB="41148" anchor="ctr">
                     <a:solidFill>
-                      <a:srgbClr val="EC7000"/>
+                      <a:srgbClr val="FF6200"/>
                     </a:solidFill>
                     <a:lnL>
                       <a:noFill/>
@@ -26868,7 +25856,7 @@
                       <a:r>
                         <a:rPr sz="1300" b="1">
                           <a:solidFill>
-                            <a:srgbClr val="1F1F1F"/>
+                            <a:srgbClr val="FFFFFF"/>
                           </a:solidFill>
                           <a:latin typeface="Calibri"/>
                         </a:rPr>
@@ -26878,7 +25866,7 @@
                   </a:txBody>
                   <a:tcPr marL="91440" marR="91440" marT="41148" marB="41148" anchor="ctr">
                     <a:solidFill>
-                      <a:srgbClr val="EC7000"/>
+                      <a:srgbClr val="FF6200"/>
                     </a:solidFill>
                     <a:lnL>
                       <a:noFill/>
@@ -26917,7 +25905,7 @@
                       <a:r>
                         <a:rPr sz="1300" b="1">
                           <a:solidFill>
-                            <a:srgbClr val="1F1F1F"/>
+                            <a:srgbClr val="FFFFFF"/>
                           </a:solidFill>
                           <a:latin typeface="Calibri"/>
                         </a:rPr>
@@ -26927,7 +25915,7 @@
                   </a:txBody>
                   <a:tcPr marL="91440" marR="91440" marT="41148" marB="41148" anchor="ctr">
                     <a:solidFill>
-                      <a:srgbClr val="EC7000"/>
+                      <a:srgbClr val="FF6200"/>
                     </a:solidFill>
                     <a:lnL>
                       <a:noFill/>
@@ -26966,7 +25954,7 @@
                       <a:r>
                         <a:rPr sz="1300" b="1">
                           <a:solidFill>
-                            <a:srgbClr val="1F1F1F"/>
+                            <a:srgbClr val="FFFFFF"/>
                           </a:solidFill>
                           <a:latin typeface="Calibri"/>
                         </a:rPr>
@@ -26988,7 +25976,7 @@
                       <a:r>
                         <a:rPr sz="1300" b="1">
                           <a:solidFill>
-                            <a:srgbClr val="1F1F1F"/>
+                            <a:srgbClr val="FFFFFF"/>
                           </a:solidFill>
                           <a:latin typeface="Calibri"/>
                         </a:rPr>
@@ -26998,7 +25986,7 @@
                   </a:txBody>
                   <a:tcPr marL="91440" marR="91440" marT="41148" marB="41148" anchor="ctr">
                     <a:solidFill>
-                      <a:srgbClr val="EC7000"/>
+                      <a:srgbClr val="FF6200"/>
                     </a:solidFill>
                     <a:lnL>
                       <a:noFill/>
@@ -27037,7 +26025,7 @@
                       <a:r>
                         <a:rPr sz="1300" b="1">
                           <a:solidFill>
-                            <a:srgbClr val="1F1F1F"/>
+                            <a:srgbClr val="FFFFFF"/>
                           </a:solidFill>
                           <a:latin typeface="Calibri"/>
                         </a:rPr>
@@ -27059,7 +26047,7 @@
                       <a:r>
                         <a:rPr sz="1300" b="1">
                           <a:solidFill>
-                            <a:srgbClr val="1F1F1F"/>
+                            <a:srgbClr val="FFFFFF"/>
                           </a:solidFill>
                           <a:latin typeface="Calibri"/>
                         </a:rPr>
@@ -27069,7 +26057,7 @@
                   </a:txBody>
                   <a:tcPr marL="91440" marR="91440" marT="41148" marB="41148" anchor="ctr">
                     <a:solidFill>
-                      <a:srgbClr val="EC7000"/>
+                      <a:srgbClr val="FF6200"/>
                     </a:solidFill>
                     <a:lnL>
                       <a:noFill/>
@@ -27409,29 +26397,7 @@
                           </a:solidFill>
                           <a:latin typeface="Calibri"/>
                         </a:rPr>
-                        <a:t>Não localizado no</a:t>
-                      </a:r>
-                    </a:p>
-                    <a:p>
-                      <a:pPr algn="ctr">
-                        <a:lnSpc>
-                          <a:spcPct val="100000"/>
-                        </a:lnSpc>
-                        <a:spcBef>
-                          <a:spcPts val="0"/>
-                        </a:spcBef>
-                        <a:spcAft>
-                          <a:spcPts val="0"/>
-                        </a:spcAft>
-                      </a:pPr>
-                      <a:r>
-                        <a:rPr sz="1300" b="0">
-                          <a:solidFill>
-                            <a:srgbClr val="1F1F1F"/>
-                          </a:solidFill>
-                          <a:latin typeface="Calibri"/>
-                        </a:rPr>
-                        <a:t>corpus acessível</a:t>
+                        <a:t>-</a:t>
                       </a:r>
                     </a:p>
                   </a:txBody>
@@ -27822,29 +26788,7 @@
                           </a:solidFill>
                           <a:latin typeface="Calibri"/>
                         </a:rPr>
-                        <a:t>Não localizado no</a:t>
-                      </a:r>
-                    </a:p>
-                    <a:p>
-                      <a:pPr algn="ctr">
-                        <a:lnSpc>
-                          <a:spcPct val="100000"/>
-                        </a:lnSpc>
-                        <a:spcBef>
-                          <a:spcPts val="0"/>
-                        </a:spcBef>
-                        <a:spcAft>
-                          <a:spcPts val="0"/>
-                        </a:spcAft>
-                      </a:pPr>
-                      <a:r>
-                        <a:rPr sz="1300" b="0">
-                          <a:solidFill>
-                            <a:srgbClr val="1F1F1F"/>
-                          </a:solidFill>
-                          <a:latin typeface="Calibri"/>
-                        </a:rPr>
-                        <a:t>corpus acessível</a:t>
+                        <a:t>-</a:t>
                       </a:r>
                     </a:p>
                   </a:txBody>
@@ -27891,29 +26835,7 @@
                           </a:solidFill>
                           <a:latin typeface="Calibri"/>
                         </a:rPr>
-                        <a:t>Não localizado no</a:t>
-                      </a:r>
-                    </a:p>
-                    <a:p>
-                      <a:pPr algn="ctr">
-                        <a:lnSpc>
-                          <a:spcPct val="100000"/>
-                        </a:lnSpc>
-                        <a:spcBef>
-                          <a:spcPts val="0"/>
-                        </a:spcBef>
-                        <a:spcAft>
-                          <a:spcPts val="0"/>
-                        </a:spcAft>
-                      </a:pPr>
-                      <a:r>
-                        <a:rPr sz="1300" b="0">
-                          <a:solidFill>
-                            <a:srgbClr val="1F1F1F"/>
-                          </a:solidFill>
-                          <a:latin typeface="Calibri"/>
-                        </a:rPr>
-                        <a:t>corpus acessível</a:t>
+                        <a:t>-</a:t>
                       </a:r>
                     </a:p>
                   </a:txBody>
@@ -28241,29 +27163,7 @@
                           </a:solidFill>
                           <a:latin typeface="Calibri"/>
                         </a:rPr>
-                        <a:t>Não localizado no</a:t>
-                      </a:r>
-                    </a:p>
-                    <a:p>
-                      <a:pPr algn="ctr">
-                        <a:lnSpc>
-                          <a:spcPct val="100000"/>
-                        </a:lnSpc>
-                        <a:spcBef>
-                          <a:spcPts val="0"/>
-                        </a:spcBef>
-                        <a:spcAft>
-                          <a:spcPts val="0"/>
-                        </a:spcAft>
-                      </a:pPr>
-                      <a:r>
-                        <a:rPr sz="1300" b="0">
-                          <a:solidFill>
-                            <a:srgbClr val="1F1F1F"/>
-                          </a:solidFill>
-                          <a:latin typeface="Calibri"/>
-                        </a:rPr>
-                        <a:t>corpus acessível</a:t>
+                        <a:t>-</a:t>
                       </a:r>
                     </a:p>
                   </a:txBody>
@@ -28583,7 +27483,7 @@
                       <a:r>
                         <a:rPr sz="1300" b="1">
                           <a:solidFill>
-                            <a:srgbClr val="1F1F1F"/>
+                            <a:srgbClr val="FFFFFF"/>
                           </a:solidFill>
                           <a:latin typeface="Calibri"/>
                         </a:rPr>
@@ -28593,7 +27493,7 @@
                   </a:txBody>
                   <a:tcPr marL="91440" marR="91440" marT="41148" marB="41148" anchor="ctr">
                     <a:solidFill>
-                      <a:srgbClr val="EC7000"/>
+                      <a:srgbClr val="FF6200"/>
                     </a:solidFill>
                     <a:lnL>
                       <a:noFill/>
@@ -28632,7 +27532,7 @@
                       <a:r>
                         <a:rPr sz="1300" b="1">
                           <a:solidFill>
-                            <a:srgbClr val="1F1F1F"/>
+                            <a:srgbClr val="FFFFFF"/>
                           </a:solidFill>
                           <a:latin typeface="Calibri"/>
                         </a:rPr>
@@ -28642,7 +27542,7 @@
                   </a:txBody>
                   <a:tcPr marL="91440" marR="91440" marT="41148" marB="41148" anchor="ctr">
                     <a:solidFill>
-                      <a:srgbClr val="EC7000"/>
+                      <a:srgbClr val="FF6200"/>
                     </a:solidFill>
                     <a:lnL>
                       <a:noFill/>
@@ -28681,7 +27581,7 @@
                       <a:r>
                         <a:rPr sz="1300" b="1">
                           <a:solidFill>
-                            <a:srgbClr val="1F1F1F"/>
+                            <a:srgbClr val="FFFFFF"/>
                           </a:solidFill>
                           <a:latin typeface="Calibri"/>
                         </a:rPr>
@@ -28691,7 +27591,7 @@
                   </a:txBody>
                   <a:tcPr marL="91440" marR="91440" marT="41148" marB="41148" anchor="ctr">
                     <a:solidFill>
-                      <a:srgbClr val="EC7000"/>
+                      <a:srgbClr val="FF6200"/>
                     </a:solidFill>
                     <a:lnL>
                       <a:noFill/>
@@ -28783,7 +27683,7 @@
                           </a:solidFill>
                           <a:latin typeface="Calibri"/>
                         </a:rPr>
-                        <a:t>Não localizado no corpus acessível</a:t>
+                        <a:t>-</a:t>
                       </a:r>
                     </a:p>
                   </a:txBody>
@@ -28830,7 +27730,7 @@
                           </a:solidFill>
                           <a:latin typeface="Calibri"/>
                         </a:rPr>
-                        <a:t>Não localizado no corpus acessível</a:t>
+                        <a:t>-</a:t>
                       </a:r>
                     </a:p>
                   </a:txBody>
@@ -28926,7 +27826,7 @@
                           </a:solidFill>
                           <a:latin typeface="Calibri"/>
                         </a:rPr>
-                        <a:t>Não localizado no corpus acessível</a:t>
+                        <a:t>-</a:t>
                       </a:r>
                     </a:p>
                   </a:txBody>
@@ -28973,7 +27873,7 @@
                           </a:solidFill>
                           <a:latin typeface="Calibri"/>
                         </a:rPr>
-                        <a:t>Não localizado no corpus acessível</a:t>
+                        <a:t>-</a:t>
                       </a:r>
                     </a:p>
                   </a:txBody>
@@ -29069,7 +27969,7 @@
                           </a:solidFill>
                           <a:latin typeface="Calibri"/>
                         </a:rPr>
-                        <a:t>Não localizado no corpus acessível</a:t>
+                        <a:t>-</a:t>
                       </a:r>
                     </a:p>
                   </a:txBody>
@@ -29116,7 +28016,7 @@
                           </a:solidFill>
                           <a:latin typeface="Calibri"/>
                         </a:rPr>
-                        <a:t>Não localizado no corpus acessível</a:t>
+                        <a:t>-</a:t>
                       </a:r>
                     </a:p>
                   </a:txBody>
@@ -29212,7 +28112,7 @@
                           </a:solidFill>
                           <a:latin typeface="Calibri"/>
                         </a:rPr>
-                        <a:t>Não localizado no corpus acessível</a:t>
+                        <a:t>-</a:t>
                       </a:r>
                     </a:p>
                   </a:txBody>
@@ -29259,7 +28159,7 @@
                           </a:solidFill>
                           <a:latin typeface="Calibri"/>
                         </a:rPr>
-                        <a:t>Não localizado no corpus acessível</a:t>
+                        <a:t>-</a:t>
                       </a:r>
                     </a:p>
                   </a:txBody>
@@ -29355,7 +28255,7 @@
                           </a:solidFill>
                           <a:latin typeface="Calibri"/>
                         </a:rPr>
-                        <a:t>Não localizado no corpus acessível</a:t>
+                        <a:t>-</a:t>
                       </a:r>
                     </a:p>
                   </a:txBody>
@@ -29402,7 +28302,7 @@
                           </a:solidFill>
                           <a:latin typeface="Calibri"/>
                         </a:rPr>
-                        <a:t>Não localizado no corpus acessível</a:t>
+                        <a:t>-</a:t>
                       </a:r>
                     </a:p>
                   </a:txBody>
@@ -29500,7 +28400,7 @@
                           </a:solidFill>
                           <a:latin typeface="Calibri"/>
                         </a:rPr>
-                        <a:t>Não localizado no corpus acessível</a:t>
+                        <a:t>-</a:t>
                       </a:r>
                     </a:p>
                   </a:txBody>
@@ -29549,7 +28449,7 @@
                           </a:solidFill>
                           <a:latin typeface="Calibri"/>
                         </a:rPr>
-                        <a:t>Não localizado no corpus acessível</a:t>
+                        <a:t>-</a:t>
                       </a:r>
                     </a:p>
                   </a:txBody>
@@ -29719,7 +28619,7 @@
         </p:nvGraphicFramePr>
         <p:xfrm>
           <a:off x="438912" y="932688"/>
-          <a:ext cx="11313868" cy="3479290"/>
+          <a:ext cx="11313868" cy="3291839"/>
         </p:xfrm>
         <a:graphic>
           <a:graphicData uri="http://schemas.openxmlformats.org/drawingml/2006/table">
@@ -29756,7 +28656,7 @@
                       <a:r>
                         <a:rPr sz="1300" b="1">
                           <a:solidFill>
-                            <a:srgbClr val="1F1F1F"/>
+                            <a:srgbClr val="FFFFFF"/>
                           </a:solidFill>
                           <a:latin typeface="Calibri"/>
                         </a:rPr>
@@ -29766,7 +28666,7 @@
                   </a:txBody>
                   <a:tcPr marL="91440" marR="91440" marT="41148" marB="41148" anchor="ctr">
                     <a:solidFill>
-                      <a:srgbClr val="EC7000"/>
+                      <a:srgbClr val="FF6200"/>
                     </a:solidFill>
                     <a:lnL>
                       <a:noFill/>
@@ -29805,7 +28705,7 @@
                       <a:r>
                         <a:rPr sz="1300" b="1">
                           <a:solidFill>
-                            <a:srgbClr val="1F1F1F"/>
+                            <a:srgbClr val="FFFFFF"/>
                           </a:solidFill>
                           <a:latin typeface="Calibri"/>
                         </a:rPr>
@@ -29815,7 +28715,7 @@
                   </a:txBody>
                   <a:tcPr marL="91440" marR="91440" marT="41148" marB="41148" anchor="ctr">
                     <a:solidFill>
-                      <a:srgbClr val="EC7000"/>
+                      <a:srgbClr val="FF6200"/>
                     </a:solidFill>
                     <a:lnL>
                       <a:noFill/>
@@ -29854,7 +28754,7 @@
                       <a:r>
                         <a:rPr sz="1300" b="1">
                           <a:solidFill>
-                            <a:srgbClr val="1F1F1F"/>
+                            <a:srgbClr val="FFFFFF"/>
                           </a:solidFill>
                           <a:latin typeface="Calibri"/>
                         </a:rPr>
@@ -29864,7 +28764,7 @@
                   </a:txBody>
                   <a:tcPr marL="91440" marR="91440" marT="41148" marB="41148" anchor="ctr">
                     <a:solidFill>
-                      <a:srgbClr val="EC7000"/>
+                      <a:srgbClr val="FF6200"/>
                     </a:solidFill>
                     <a:lnL>
                       <a:noFill/>
@@ -29903,7 +28803,7 @@
                       <a:r>
                         <a:rPr sz="1300" b="1">
                           <a:solidFill>
-                            <a:srgbClr val="1F1F1F"/>
+                            <a:srgbClr val="FFFFFF"/>
                           </a:solidFill>
                           <a:latin typeface="Calibri"/>
                         </a:rPr>
@@ -29925,7 +28825,7 @@
                       <a:r>
                         <a:rPr sz="1300" b="1">
                           <a:solidFill>
-                            <a:srgbClr val="1F1F1F"/>
+                            <a:srgbClr val="FFFFFF"/>
                           </a:solidFill>
                           <a:latin typeface="Calibri"/>
                         </a:rPr>
@@ -29935,7 +28835,7 @@
                   </a:txBody>
                   <a:tcPr marL="91440" marR="91440" marT="41148" marB="41148" anchor="ctr">
                     <a:solidFill>
-                      <a:srgbClr val="EC7000"/>
+                      <a:srgbClr val="FF6200"/>
                     </a:solidFill>
                     <a:lnL>
                       <a:noFill/>
@@ -29974,7 +28874,7 @@
                       <a:r>
                         <a:rPr sz="1300" b="1">
                           <a:solidFill>
-                            <a:srgbClr val="1F1F1F"/>
+                            <a:srgbClr val="FFFFFF"/>
                           </a:solidFill>
                           <a:latin typeface="Calibri"/>
                         </a:rPr>
@@ -29996,7 +28896,7 @@
                       <a:r>
                         <a:rPr sz="1300" b="1">
                           <a:solidFill>
-                            <a:srgbClr val="1F1F1F"/>
+                            <a:srgbClr val="FFFFFF"/>
                           </a:solidFill>
                           <a:latin typeface="Calibri"/>
                         </a:rPr>
@@ -30006,7 +28906,7 @@
                   </a:txBody>
                   <a:tcPr marL="91440" marR="91440" marT="41148" marB="41148" anchor="ctr">
                     <a:solidFill>
-                      <a:srgbClr val="EC7000"/>
+                      <a:srgbClr val="FF6200"/>
                     </a:solidFill>
                     <a:lnL>
                       <a:noFill/>
@@ -30693,51 +29593,7 @@
                           </a:solidFill>
                           <a:latin typeface="Calibri"/>
                         </a:rPr>
-                        <a:t>Benchmark remetido ao</a:t>
-                      </a:r>
-                    </a:p>
-                    <a:p>
-                      <a:pPr algn="ctr">
-                        <a:lnSpc>
-                          <a:spcPct val="100000"/>
-                        </a:lnSpc>
-                        <a:spcBef>
-                          <a:spcPts val="0"/>
-                        </a:spcBef>
-                        <a:spcAft>
-                          <a:spcPts val="0"/>
-                        </a:spcAft>
-                      </a:pPr>
-                      <a:r>
-                        <a:rPr sz="1300" b="0">
-                          <a:solidFill>
-                            <a:srgbClr val="1F1F1F"/>
-                          </a:solidFill>
-                          <a:latin typeface="Calibri"/>
-                        </a:rPr>
-                        <a:t>apêndice; spread final</a:t>
-                      </a:r>
-                    </a:p>
-                    <a:p>
-                      <a:pPr algn="ctr">
-                        <a:lnSpc>
-                          <a:spcPct val="100000"/>
-                        </a:lnSpc>
-                        <a:spcBef>
-                          <a:spcPts val="0"/>
-                        </a:spcBef>
-                        <a:spcAft>
-                          <a:spcPts val="0"/>
-                        </a:spcAft>
-                      </a:pPr>
-                      <a:r>
-                        <a:rPr sz="1300" b="0">
-                          <a:solidFill>
-                            <a:srgbClr val="1F1F1F"/>
-                          </a:solidFill>
-                          <a:latin typeface="Calibri"/>
-                        </a:rPr>
-                        <a:t>não localizado</a:t>
+                        <a:t>-</a:t>
                       </a:r>
                     </a:p>
                   </a:txBody>
@@ -31219,29 +30075,7 @@
                           </a:solidFill>
                           <a:latin typeface="Calibri"/>
                         </a:rPr>
-                        <a:t>Não localizado no</a:t>
-                      </a:r>
-                    </a:p>
-                    <a:p>
-                      <a:pPr algn="ctr">
-                        <a:lnSpc>
-                          <a:spcPct val="100000"/>
-                        </a:lnSpc>
-                        <a:spcBef>
-                          <a:spcPts val="0"/>
-                        </a:spcBef>
-                        <a:spcAft>
-                          <a:spcPts val="0"/>
-                        </a:spcAft>
-                      </a:pPr>
-                      <a:r>
-                        <a:rPr sz="1300" b="0">
-                          <a:solidFill>
-                            <a:srgbClr val="1F1F1F"/>
-                          </a:solidFill>
-                          <a:latin typeface="Calibri"/>
-                        </a:rPr>
-                        <a:t>corpus acessível</a:t>
+                        <a:t>-</a:t>
                       </a:r>
                     </a:p>
                   </a:txBody>
@@ -31264,7 +30098,7 @@
                   </a:tcPr>
                 </a:tc>
               </a:tr>
-              <a:tr h="845819">
+              <a:tr h="658368">
                 <a:tc>
                   <a:txBody>
                     <a:bodyPr wrap="square">
@@ -31454,51 +30288,7 @@
                           </a:solidFill>
                           <a:latin typeface="Calibri"/>
                         </a:rPr>
-                        <a:t>20/03/2025;</a:t>
-                      </a:r>
-                    </a:p>
-                    <a:p>
-                      <a:pPr algn="ctr">
-                        <a:lnSpc>
-                          <a:spcPct val="100000"/>
-                        </a:lnSpc>
-                        <a:spcBef>
-                          <a:spcPts val="0"/>
-                        </a:spcBef>
-                        <a:spcAft>
-                          <a:spcPts val="0"/>
-                        </a:spcAft>
-                      </a:pPr>
-                      <a:r>
-                        <a:rPr sz="1300" b="0">
-                          <a:solidFill>
-                            <a:srgbClr val="1F1F1F"/>
-                          </a:solidFill>
-                          <a:latin typeface="Calibri"/>
-                        </a:rPr>
-                        <a:t>distribuição final não</a:t>
-                      </a:r>
-                    </a:p>
-                    <a:p>
-                      <a:pPr algn="ctr">
-                        <a:lnSpc>
-                          <a:spcPct val="100000"/>
-                        </a:lnSpc>
-                        <a:spcBef>
-                          <a:spcPts val="0"/>
-                        </a:spcBef>
-                        <a:spcAft>
-                          <a:spcPts val="0"/>
-                        </a:spcAft>
-                      </a:pPr>
-                      <a:r>
-                        <a:rPr sz="1300" b="0">
-                          <a:solidFill>
-                            <a:srgbClr val="1F1F1F"/>
-                          </a:solidFill>
-                          <a:latin typeface="Calibri"/>
-                        </a:rPr>
-                        <a:t>localizada neste corpus</a:t>
+                        <a:t>20/03/2025</a:t>
                       </a:r>
                     </a:p>
                   </a:txBody>
@@ -31640,29 +30430,7 @@
                           </a:solidFill>
                           <a:latin typeface="Calibri"/>
                         </a:rPr>
-                        <a:t>Não localizado no</a:t>
-                      </a:r>
-                    </a:p>
-                    <a:p>
-                      <a:pPr algn="ctr">
-                        <a:lnSpc>
-                          <a:spcPct val="100000"/>
-                        </a:lnSpc>
-                        <a:spcBef>
-                          <a:spcPts val="0"/>
-                        </a:spcBef>
-                        <a:spcAft>
-                          <a:spcPts val="0"/>
-                        </a:spcAft>
-                      </a:pPr>
-                      <a:r>
-                        <a:rPr sz="1300" b="0">
-                          <a:solidFill>
-                            <a:srgbClr val="1F1F1F"/>
-                          </a:solidFill>
-                          <a:latin typeface="Calibri"/>
-                        </a:rPr>
-                        <a:t>corpus acessível</a:t>
+                        <a:t>-</a:t>
                       </a:r>
                     </a:p>
                   </a:txBody>
